--- a/lecons/F5/20_F5_M1_L17_Volume_of_Trade.pptx
+++ b/lecons/F5/20_F5_M1_L17_Volume_of_Trade.pptx
@@ -56,9 +56,11 @@
     <p:sldId id="304" r:id="rId50"/>
     <p:sldId id="305" r:id="rId51"/>
     <p:sldId id="306" r:id="rId52"/>
+    <p:sldId id="307" r:id="rId53"/>
+    <p:sldId id="308" r:id="rId54"/>
   </p:sldIdLst>
   <p:notesMasterIdLst>
-    <p:notesMasterId r:id="rId53"/>
+    <p:notesMasterId r:id="rId55"/>
   </p:notesMasterIdLst>
   <p:sldSz cx="12192000" cy="6858000"/>
   <p:notesSz cx="6858000" cy="12192000"/>
@@ -3192,7 +3194,7 @@
           <a:p>
             <a:r>
               <a:rPr lang="en-US" dirty="0"/>
-              <a:t>Let us copy Major Trade Routes and Global Patterns. World trade follows the following routes and patterns. On this slide we have North Atlantic route and Suez and Panama routes. Write each point on a new line, with the key term first, and explain it in your own words when we revise. When you finish, we go to the next slide.</a:t>
+              <a:t>Let us copy Routes and Pattern. World trade follows the following routes and pattern. On this slide we have North Atlantic route and Suez and Panama routes. Write each point on a new line, with the key term first, and explain it in your own words when we revise. When you finish, we go to the next slide.</a:t>
             </a:r>
             <a:endParaRPr lang="en-US" dirty="0"/>
           </a:p>
@@ -3280,7 +3282,7 @@
           <a:p>
             <a:r>
               <a:rPr lang="en-US" dirty="0"/>
-              <a:t>We continue with Major Trade Routes and Global Patterns. On this slide we have Pattern and Reasons. Write each point on a new line, with the key term first, and explain it in your own words when we revise.</a:t>
+              <a:t>We continue with Routes and Pattern. On this slide we have Pattern. Write each point on a new line, with the key term first, and explain it in your own words when we revise.</a:t>
             </a:r>
             <a:endParaRPr lang="en-US" dirty="0"/>
           </a:p>
@@ -3368,7 +3370,7 @@
           <a:p>
             <a:r>
               <a:rPr lang="en-US" dirty="0"/>
-              <a:t>Now draw this illustration in your notebook: the world economic triad. Give it a title and label it clearly.</a:t>
+              <a:t>Let us copy Reasons for the Dominance of AICs. AICs dominate world trade for the following reasons. On this slide we have Valuable goods and Capital. Write each point on a new line, with the key term first, and explain it in your own words when we revise. When you finish, we go to the next slide.</a:t>
             </a:r>
             <a:endParaRPr lang="en-US" dirty="0"/>
           </a:p>
@@ -3544,7 +3546,7 @@
           <a:p>
             <a:r>
               <a:rPr lang="en-US" dirty="0"/>
-              <a:t>Now let us check what you have understood. Question 1: Define international trade. Answer in your exercise book.</a:t>
+              <a:t>We continue with Reasons for the Dominance of AICs. On this slide we have Control of transport and markets. Write each point on a new line, with the key term first, and explain it in your own words when we revise.</a:t>
             </a:r>
             <a:endParaRPr lang="en-US" dirty="0"/>
           </a:p>
@@ -3632,7 +3634,7 @@
           <a:p>
             <a:r>
               <a:rPr lang="en-US" dirty="0"/>
-              <a:t>The expected answer is: trade between countries. If you got it right, well done.</a:t>
+              <a:t>Now draw this illustration in your notebook: the world economic triad. Give it a title and label it clearly.</a:t>
             </a:r>
             <a:endParaRPr lang="en-US" dirty="0"/>
           </a:p>
@@ -3720,7 +3722,7 @@
           <a:p>
             <a:r>
               <a:rPr lang="en-US" dirty="0"/>
-              <a:t>Now let us check what you have understood. Question 2: Give two reasons for the dominance of AICs in world trade. Answer in your exercise book.</a:t>
+              <a:t>Now let us check what you have understood. Question 1: Define international trade. Answer in your exercise book.</a:t>
             </a:r>
             <a:endParaRPr lang="en-US" dirty="0"/>
           </a:p>
@@ -3808,7 +3810,7 @@
           <a:p>
             <a:r>
               <a:rPr lang="en-US" dirty="0"/>
-              <a:t>The expected answer is: they export manufactured goods and control transport and finance. If you got it right, well done.</a:t>
+              <a:t>The expected answer is: trade between countries. If you got it right, well done.</a:t>
             </a:r>
             <a:endParaRPr lang="en-US" dirty="0"/>
           </a:p>
@@ -3896,7 +3898,7 @@
           <a:p>
             <a:r>
               <a:rPr lang="en-US" dirty="0"/>
-              <a:t>For those who need more practice, fill in the blanks in your exercise book. The answers are: number 1, exports; number 2, internal; number 3, Atlantic.</a:t>
+              <a:t>Now let us check what you have understood. Question 2: Give two reasons for the dominance of AICs in world trade. Answer in your exercise book.</a:t>
             </a:r>
             <a:endParaRPr lang="en-US" dirty="0"/>
           </a:p>
@@ -3984,7 +3986,7 @@
           <a:p>
             <a:r>
               <a:rPr lang="en-US" dirty="0"/>
-              <a:t>For your homework: List three exports and three imports of Cameroon. We shall correct it at the beginning of our next lesson.</a:t>
+              <a:t>The expected answer is: they export manufactured goods and control transport and finance. If you got it right, well done.</a:t>
             </a:r>
             <a:endParaRPr lang="en-US" dirty="0"/>
           </a:p>
@@ -4072,7 +4074,7 @@
           <a:p>
             <a:r>
               <a:rPr lang="en-US" dirty="0"/>
-              <a:t>Our next lesson will be on Lesson 18: Trade Blocs. Thank you for your attention, and see you next time.</a:t>
+              <a:t>For those who need more practice, fill in the blanks in your exercise book. The answers are: number 1, exports; number 2, internal; number 3, Atlantic.</a:t>
             </a:r>
             <a:endParaRPr lang="en-US" dirty="0"/>
           </a:p>
@@ -4160,7 +4162,7 @@
           <a:p>
             <a:r>
               <a:rPr lang="en-US" dirty="0"/>
-              <a:t>Let us play the bilingual game. I say a word in English, and you give me the French word. Then we do the reverse.</a:t>
+              <a:t>For your homework: List three exports and three imports of Cameroon. We shall correct it at the beginning of our next lesson.</a:t>
             </a:r>
             <a:endParaRPr lang="en-US" dirty="0"/>
           </a:p>
@@ -4248,7 +4250,7 @@
           <a:p>
             <a:r>
               <a:rPr lang="en-US" dirty="0"/>
-              <a:t>I record this information in the official logbook of the class after the lesson.</a:t>
+              <a:t>Our next lesson will be on Lesson 18: Trade Blocs. Thank you for your attention, and see you next time.</a:t>
             </a:r>
             <a:endParaRPr lang="en-US" dirty="0"/>
           </a:p>
@@ -4336,7 +4338,7 @@
           <a:p>
             <a:r>
               <a:rPr lang="en-US" dirty="0"/>
-              <a:t>I complete the second page of the logbook: the matter taught, the evaluation, the homework and the attendance.</a:t>
+              <a:t>Let us play the bilingual game. I say a word in English, and you give me the French word. Then we do the reverse.</a:t>
             </a:r>
             <a:endParaRPr lang="en-US" dirty="0"/>
           </a:p>
@@ -4512,7 +4514,7 @@
           <a:p>
             <a:r>
               <a:rPr lang="en-US" dirty="0"/>
-              <a:t>This slide is for me, the teacher: it gives the timing of the lesson and what to do if the projector is not available.</a:t>
+              <a:t>I record this information in the official logbook of the class after the lesson.</a:t>
             </a:r>
             <a:endParaRPr lang="en-US" dirty="0"/>
           </a:p>
@@ -4600,7 +4602,7 @@
           <a:p>
             <a:r>
               <a:rPr lang="en-US" dirty="0"/>
-              <a:t>These are the references and picture credits used to prepare this lesson.</a:t>
+              <a:t>I complete the second page of the logbook: the matter taught, the evaluation, the homework and the attendance.</a:t>
             </a:r>
             <a:endParaRPr lang="en-US" dirty="0"/>
           </a:p>
@@ -4624,6 +4626,182 @@
             <a:fld id="{F7021451-1387-4CA6-816F-3879F97B5CBC}" type="slidenum">
               <a:rPr lang="en-US"/>
               <a:t>51</a:t>
+            </a:fld>
+            <a:endParaRPr lang="en-US"/>
+          </a:p>
+        </p:txBody>
+      </p:sp>
+    </p:spTree>
+    <p:extLst>
+      <p:ext uri="{BB962C8B-B14F-4D97-AF65-F5344CB8AC3E}">
+        <p14:creationId xmlns:p14="http://schemas.microsoft.com/office/powerpoint/2010/main" val="1024086991"/>
+      </p:ext>
+    </p:extLst>
+  </p:cSld>
+  <p:clrMapOvr>
+    <a:masterClrMapping/>
+  </p:clrMapOvr>
+</p:notes>
+</file>
+
+<file path=ppt/notesSlides/notesSlide52.xml><?xml version="1.0" encoding="utf-8"?>
+<p:notes xmlns:a="http://schemas.openxmlformats.org/drawingml/2006/main" xmlns:r="http://schemas.openxmlformats.org/officeDocument/2006/relationships" xmlns:p="http://schemas.openxmlformats.org/presentationml/2006/main">
+  <p:cSld>
+    <p:spTree>
+      <p:nvGrpSpPr>
+        <p:cNvPr id="1" name=""/>
+        <p:cNvGrpSpPr/>
+        <p:nvPr/>
+      </p:nvGrpSpPr>
+      <p:grpSpPr>
+        <a:xfrm>
+          <a:off x="0" y="0"/>
+          <a:ext cx="0" cy="0"/>
+          <a:chOff x="0" y="0"/>
+          <a:chExt cx="0" cy="0"/>
+        </a:xfrm>
+      </p:grpSpPr>
+      <p:sp>
+        <p:nvSpPr>
+          <p:cNvPr id="2" name="Slide Image Placeholder 1"/>
+          <p:cNvSpPr>
+            <a:spLocks noGrp="1" noRot="1" noChangeAspect="1"/>
+          </p:cNvSpPr>
+          <p:nvPr>
+            <p:ph type="sldImg"/>
+          </p:nvPr>
+        </p:nvSpPr>
+        <p:spPr/>
+      </p:sp>
+      <p:sp>
+        <p:nvSpPr>
+          <p:cNvPr id="3" name="Notes Placeholder 2"/>
+          <p:cNvSpPr>
+            <a:spLocks noGrp="1"/>
+          </p:cNvSpPr>
+          <p:nvPr>
+            <p:ph type="body" idx="1"/>
+          </p:nvPr>
+        </p:nvSpPr>
+        <p:spPr/>
+        <p:txBody>
+          <a:bodyPr/>
+          <a:lstStyle/>
+          <a:p>
+            <a:r>
+              <a:rPr lang="en-US" dirty="0"/>
+              <a:t>This slide is for me, the teacher: it gives the timing of the lesson and what to do if the projector is not available.</a:t>
+            </a:r>
+            <a:endParaRPr lang="en-US" dirty="0"/>
+          </a:p>
+        </p:txBody>
+      </p:sp>
+      <p:sp>
+        <p:nvSpPr>
+          <p:cNvPr id="4" name="Slide Number Placeholder 3"/>
+          <p:cNvSpPr>
+            <a:spLocks noGrp="1"/>
+          </p:cNvSpPr>
+          <p:nvPr>
+            <p:ph type="sldNum" sz="quarter" idx="10"/>
+          </p:nvPr>
+        </p:nvSpPr>
+        <p:spPr/>
+        <p:txBody>
+          <a:bodyPr/>
+          <a:lstStyle/>
+          <a:p>
+            <a:fld id="{F7021451-1387-4CA6-816F-3879F97B5CBC}" type="slidenum">
+              <a:rPr lang="en-US"/>
+              <a:t>52</a:t>
+            </a:fld>
+            <a:endParaRPr lang="en-US"/>
+          </a:p>
+        </p:txBody>
+      </p:sp>
+    </p:spTree>
+    <p:extLst>
+      <p:ext uri="{BB962C8B-B14F-4D97-AF65-F5344CB8AC3E}">
+        <p14:creationId xmlns:p14="http://schemas.microsoft.com/office/powerpoint/2010/main" val="1024086991"/>
+      </p:ext>
+    </p:extLst>
+  </p:cSld>
+  <p:clrMapOvr>
+    <a:masterClrMapping/>
+  </p:clrMapOvr>
+</p:notes>
+</file>
+
+<file path=ppt/notesSlides/notesSlide53.xml><?xml version="1.0" encoding="utf-8"?>
+<p:notes xmlns:a="http://schemas.openxmlformats.org/drawingml/2006/main" xmlns:r="http://schemas.openxmlformats.org/officeDocument/2006/relationships" xmlns:p="http://schemas.openxmlformats.org/presentationml/2006/main">
+  <p:cSld>
+    <p:spTree>
+      <p:nvGrpSpPr>
+        <p:cNvPr id="1" name=""/>
+        <p:cNvGrpSpPr/>
+        <p:nvPr/>
+      </p:nvGrpSpPr>
+      <p:grpSpPr>
+        <a:xfrm>
+          <a:off x="0" y="0"/>
+          <a:ext cx="0" cy="0"/>
+          <a:chOff x="0" y="0"/>
+          <a:chExt cx="0" cy="0"/>
+        </a:xfrm>
+      </p:grpSpPr>
+      <p:sp>
+        <p:nvSpPr>
+          <p:cNvPr id="2" name="Slide Image Placeholder 1"/>
+          <p:cNvSpPr>
+            <a:spLocks noGrp="1" noRot="1" noChangeAspect="1"/>
+          </p:cNvSpPr>
+          <p:nvPr>
+            <p:ph type="sldImg"/>
+          </p:nvPr>
+        </p:nvSpPr>
+        <p:spPr/>
+      </p:sp>
+      <p:sp>
+        <p:nvSpPr>
+          <p:cNvPr id="3" name="Notes Placeholder 2"/>
+          <p:cNvSpPr>
+            <a:spLocks noGrp="1"/>
+          </p:cNvSpPr>
+          <p:nvPr>
+            <p:ph type="body" idx="1"/>
+          </p:nvPr>
+        </p:nvSpPr>
+        <p:spPr/>
+        <p:txBody>
+          <a:bodyPr/>
+          <a:lstStyle/>
+          <a:p>
+            <a:r>
+              <a:rPr lang="en-US" dirty="0"/>
+              <a:t>These are the references and picture credits used to prepare this lesson.</a:t>
+            </a:r>
+            <a:endParaRPr lang="en-US" dirty="0"/>
+          </a:p>
+        </p:txBody>
+      </p:sp>
+      <p:sp>
+        <p:nvSpPr>
+          <p:cNvPr id="4" name="Slide Number Placeholder 3"/>
+          <p:cNvSpPr>
+            <a:spLocks noGrp="1"/>
+          </p:cNvSpPr>
+          <p:nvPr>
+            <p:ph type="sldNum" sz="quarter" idx="10"/>
+          </p:nvPr>
+        </p:nvSpPr>
+        <p:spPr/>
+        <p:txBody>
+          <a:bodyPr/>
+          <a:lstStyle/>
+          <a:p>
+            <a:fld id="{F7021451-1387-4CA6-816F-3879F97B5CBC}" type="slidenum">
+              <a:rPr lang="en-US"/>
+              <a:t>53</a:t>
             </a:fld>
             <a:endParaRPr lang="en-US"/>
           </a:p>
@@ -14085,8 +14263,47 @@
         </p:nvSpPr>
         <p:spPr>
           <a:xfrm>
-            <a:off x="1691640" y="1783080"/>
-            <a:ext cx="10180015" cy="4663440"/>
+            <a:off x="1691640" y="1737360"/>
+            <a:ext cx="10180015" cy="457200"/>
+          </a:xfrm>
+          <a:prstGeom prst="rect">
+            <a:avLst/>
+          </a:prstGeom>
+          <a:noFill/>
+          <a:ln/>
+        </p:spPr>
+        <p:txBody>
+          <a:bodyPr wrap="square" lIns="0" tIns="0" rIns="0" bIns="0" rtlCol="0" anchor="ctr"/>
+          <a:lstStyle/>
+          <a:p>
+            <a:pPr algn="l" indent="0" marL="0">
+              <a:buNone/>
+            </a:pPr>
+            <a:r>
+              <a:rPr lang="en-US" sz="3200" b="1" dirty="0">
+                <a:solidFill>
+                  <a:srgbClr val="990011"/>
+                </a:solidFill>
+                <a:latin typeface="Times New Roman" pitchFamily="34" charset="0"/>
+                <a:ea typeface="Times New Roman" pitchFamily="34" charset="-122"/>
+                <a:cs typeface="Times New Roman" pitchFamily="34" charset="-120"/>
+              </a:rPr>
+              <a:t>A) Routes and Pattern</a:t>
+            </a:r>
+            <a:endParaRPr lang="en-US" sz="3200" dirty="0"/>
+          </a:p>
+        </p:txBody>
+      </p:sp>
+      <p:sp>
+        <p:nvSpPr>
+          <p:cNvPr id="6" name="Text 3"/>
+          <p:cNvSpPr/>
+          <p:nvPr/>
+        </p:nvSpPr>
+        <p:spPr>
+          <a:xfrm>
+            <a:off x="1691640" y="2240280"/>
+            <a:ext cx="10180015" cy="4206240"/>
           </a:xfrm>
           <a:prstGeom prst="rect">
             <a:avLst/>
@@ -14113,7 +14330,7 @@
                 <a:ea typeface="Times New Roman" pitchFamily="34" charset="-122"/>
                 <a:cs typeface="Times New Roman" pitchFamily="34" charset="-120"/>
               </a:rPr>
-              <a:t>World trade follows the following routes and patterns:</a:t>
+              <a:t>World trade follows the following routes and pattern:</a:t>
             </a:r>
             <a:endParaRPr lang="en-US" sz="4000" dirty="0"/>
           </a:p>
@@ -14364,7 +14581,7 @@
                 <a:ea typeface="Times New Roman" pitchFamily="34" charset="-122"/>
                 <a:cs typeface="Times New Roman" pitchFamily="34" charset="-120"/>
               </a:rPr>
-              <a:t>2. Major Trade Routes and Global Patterns (continued)</a:t>
+              <a:t>2. Major Trade Routes and Global Patterns</a:t>
             </a:r>
             <a:endParaRPr lang="en-US" sz="3600" dirty="0"/>
           </a:p>
@@ -14378,8 +14595,47 @@
         </p:nvSpPr>
         <p:spPr>
           <a:xfrm>
-            <a:off x="5349240" y="1783080"/>
-            <a:ext cx="6522415" cy="4663440"/>
+            <a:off x="5349240" y="1737360"/>
+            <a:ext cx="6522415" cy="457200"/>
+          </a:xfrm>
+          <a:prstGeom prst="rect">
+            <a:avLst/>
+          </a:prstGeom>
+          <a:noFill/>
+          <a:ln/>
+        </p:spPr>
+        <p:txBody>
+          <a:bodyPr wrap="square" lIns="0" tIns="0" rIns="0" bIns="0" rtlCol="0" anchor="ctr"/>
+          <a:lstStyle/>
+          <a:p>
+            <a:pPr algn="l" indent="0" marL="0">
+              <a:buNone/>
+            </a:pPr>
+            <a:r>
+              <a:rPr lang="en-US" sz="3100" b="1" dirty="0">
+                <a:solidFill>
+                  <a:srgbClr val="990011"/>
+                </a:solidFill>
+                <a:latin typeface="Times New Roman" pitchFamily="34" charset="0"/>
+                <a:ea typeface="Times New Roman" pitchFamily="34" charset="-122"/>
+                <a:cs typeface="Times New Roman" pitchFamily="34" charset="-120"/>
+              </a:rPr>
+              <a:t>A) Routes and Pattern (continued)</a:t>
+            </a:r>
+            <a:endParaRPr lang="en-US" sz="3100" dirty="0"/>
+          </a:p>
+        </p:txBody>
+      </p:sp>
+      <p:sp>
+        <p:nvSpPr>
+          <p:cNvPr id="6" name="Text 3"/>
+          <p:cNvSpPr/>
+          <p:nvPr/>
+        </p:nvSpPr>
+        <p:spPr>
+          <a:xfrm>
+            <a:off x="5349240" y="2240280"/>
+            <a:ext cx="6522415" cy="4206240"/>
           </a:xfrm>
           <a:prstGeom prst="rect">
             <a:avLst/>
@@ -14424,43 +14680,6 @@
                 <a:cs typeface="Times New Roman" pitchFamily="34" charset="-120"/>
               </a:rPr>
               <a:t>Most trade is among AICs and East Asia, and LICs export raw materials.</a:t>
-            </a:r>
-            <a:endParaRPr lang="en-US" sz="4000" dirty="0"/>
-          </a:p>
-          <a:p>
-            <a:pPr algn="l" indent="0" marL="0">
-              <a:spcAft>
-                <a:spcPts val="800"/>
-              </a:spcAft>
-              <a:buNone/>
-            </a:pPr>
-            <a:r>
-              <a:rPr lang="en-US" sz="4000" b="1" dirty="0">
-                <a:solidFill>
-                  <a:srgbClr val="111111"/>
-                </a:solidFill>
-                <a:latin typeface="Times New Roman" pitchFamily="34" charset="0"/>
-                <a:ea typeface="Times New Roman" pitchFamily="34" charset="-122"/>
-                <a:cs typeface="Times New Roman" pitchFamily="34" charset="-120"/>
-              </a:rPr>
-              <a:t>Reasons: </a:t>
-            </a:r>
-            <a:pPr algn="l" indent="0" marL="0">
-              <a:spcAft>
-                <a:spcPts val="800"/>
-              </a:spcAft>
-              <a:buNone/>
-            </a:pPr>
-            <a:r>
-              <a:rPr lang="en-US" sz="4000" dirty="0">
-                <a:solidFill>
-                  <a:srgbClr val="111111"/>
-                </a:solidFill>
-                <a:latin typeface="Times New Roman" pitchFamily="34" charset="0"/>
-                <a:ea typeface="Times New Roman" pitchFamily="34" charset="-122"/>
-                <a:cs typeface="Times New Roman" pitchFamily="34" charset="-120"/>
-              </a:rPr>
-              <a:t>AICs produce valuable goods, have capital and control transport and markets.</a:t>
             </a:r>
             <a:endParaRPr lang="en-US" sz="4000" dirty="0"/>
           </a:p>
@@ -14578,48 +14797,9 @@
           </a:p>
         </p:txBody>
       </p:sp>
-      <p:sp>
-        <p:nvSpPr>
-          <p:cNvPr id="3" name="Text 1"/>
-          <p:cNvSpPr/>
-          <p:nvPr/>
-        </p:nvSpPr>
-        <p:spPr>
-          <a:xfrm>
-            <a:off x="457200" y="1005840"/>
-            <a:ext cx="11277295" cy="731520"/>
-          </a:xfrm>
-          <a:prstGeom prst="rect">
-            <a:avLst/>
-          </a:prstGeom>
-          <a:noFill/>
-          <a:ln/>
-        </p:spPr>
-        <p:txBody>
-          <a:bodyPr wrap="square" lIns="0" tIns="0" rIns="0" bIns="0" rtlCol="0" anchor="ctr"/>
-          <a:lstStyle/>
-          <a:p>
-            <a:pPr algn="ctr" indent="0" marL="0">
-              <a:buNone/>
-            </a:pPr>
-            <a:r>
-              <a:rPr lang="en-US" sz="3600" b="1" dirty="0">
-                <a:solidFill>
-                  <a:srgbClr val="990011"/>
-                </a:solidFill>
-                <a:latin typeface="Times New Roman" pitchFamily="34" charset="0"/>
-                <a:ea typeface="Times New Roman" pitchFamily="34" charset="-122"/>
-                <a:cs typeface="Times New Roman" pitchFamily="34" charset="-120"/>
-              </a:rPr>
-              <a:t>2. Major Trade Routes and Global Patterns</a:t>
-            </a:r>
-            <a:endParaRPr lang="en-US" sz="3600" dirty="0"/>
-          </a:p>
-        </p:txBody>
-      </p:sp>
       <p:pic>
         <p:nvPicPr>
-          <p:cNvPr id="4" name="Image 0" descr="/home/claude/f4/img/v2/triad_big.png">    </p:cNvPr>
+          <p:cNvPr id="3" name="Image 0" descr="/home/claude/f4/img/minesec_sheet.png">    </p:cNvPr>
           <p:cNvPicPr>
             <a:picLocks noChangeAspect="1"/>
           </p:cNvPicPr>
@@ -14633,8 +14813,8 @@
         </p:blipFill>
         <p:spPr>
           <a:xfrm>
-            <a:off x="1825600" y="1783080"/>
-            <a:ext cx="8540496" cy="4270248"/>
+            <a:off x="0" y="658368"/>
+            <a:ext cx="3840480" cy="5833872"/>
           </a:xfrm>
           <a:prstGeom prst="rect">
             <a:avLst/>
@@ -14643,14 +14823,14 @@
       </p:pic>
       <p:sp>
         <p:nvSpPr>
-          <p:cNvPr id="5" name="Text 2"/>
+          <p:cNvPr id="4" name="Text 1"/>
           <p:cNvSpPr/>
           <p:nvPr/>
         </p:nvSpPr>
         <p:spPr>
           <a:xfrm>
-            <a:off x="457200" y="6089904"/>
-            <a:ext cx="11277295" cy="347472"/>
+            <a:off x="4069080" y="1005840"/>
+            <a:ext cx="7802575" cy="731520"/>
           </a:xfrm>
           <a:prstGeom prst="rect">
             <a:avLst/>
@@ -14659,24 +14839,181 @@
           <a:ln/>
         </p:spPr>
         <p:txBody>
-          <a:bodyPr wrap="square" lIns="0" tIns="0" rIns="0" bIns="0" rtlCol="0" anchor="ctr"/>
+          <a:bodyPr wrap="square" lIns="0" tIns="0" rIns="0" bIns="0" rtlCol="0" anchor="ctr">
+            <a:normAutofit/>
+          </a:bodyPr>
           <a:lstStyle/>
           <a:p>
             <a:pPr algn="ctr" indent="0" marL="0">
               <a:buNone/>
             </a:pPr>
             <a:r>
-              <a:rPr lang="en-US" sz="1800" i="1" dirty="0">
-                <a:solidFill>
-                  <a:srgbClr val="555555"/>
+              <a:rPr lang="en-US" sz="3600" b="1" dirty="0">
+                <a:solidFill>
+                  <a:srgbClr val="990011"/>
                 </a:solidFill>
                 <a:latin typeface="Times New Roman" pitchFamily="34" charset="0"/>
                 <a:ea typeface="Times New Roman" pitchFamily="34" charset="-122"/>
                 <a:cs typeface="Times New Roman" pitchFamily="34" charset="-120"/>
               </a:rPr>
-              <a:t>Illustration: the world economic triad</a:t>
-            </a:r>
-            <a:endParaRPr lang="en-US" sz="1800" dirty="0"/>
+              <a:t>2. Major Trade Routes and Global Patterns</a:t>
+            </a:r>
+            <a:endParaRPr lang="en-US" sz="3600" dirty="0"/>
+          </a:p>
+        </p:txBody>
+      </p:sp>
+      <p:sp>
+        <p:nvSpPr>
+          <p:cNvPr id="5" name="Text 2"/>
+          <p:cNvSpPr/>
+          <p:nvPr/>
+        </p:nvSpPr>
+        <p:spPr>
+          <a:xfrm>
+            <a:off x="4069080" y="1737360"/>
+            <a:ext cx="7802575" cy="457200"/>
+          </a:xfrm>
+          <a:prstGeom prst="rect">
+            <a:avLst/>
+          </a:prstGeom>
+          <a:noFill/>
+          <a:ln/>
+        </p:spPr>
+        <p:txBody>
+          <a:bodyPr wrap="square" lIns="0" tIns="0" rIns="0" bIns="0" rtlCol="0" anchor="ctr"/>
+          <a:lstStyle/>
+          <a:p>
+            <a:pPr algn="l" indent="0" marL="0">
+              <a:buNone/>
+            </a:pPr>
+            <a:r>
+              <a:rPr lang="en-US" sz="3200" b="1" dirty="0">
+                <a:solidFill>
+                  <a:srgbClr val="990011"/>
+                </a:solidFill>
+                <a:latin typeface="Times New Roman" pitchFamily="34" charset="0"/>
+                <a:ea typeface="Times New Roman" pitchFamily="34" charset="-122"/>
+                <a:cs typeface="Times New Roman" pitchFamily="34" charset="-120"/>
+              </a:rPr>
+              <a:t>B) Reasons for the Dominance of AICs</a:t>
+            </a:r>
+            <a:endParaRPr lang="en-US" sz="3200" dirty="0"/>
+          </a:p>
+        </p:txBody>
+      </p:sp>
+      <p:sp>
+        <p:nvSpPr>
+          <p:cNvPr id="6" name="Text 3"/>
+          <p:cNvSpPr/>
+          <p:nvPr/>
+        </p:nvSpPr>
+        <p:spPr>
+          <a:xfrm>
+            <a:off x="4069080" y="2240280"/>
+            <a:ext cx="7802575" cy="4206240"/>
+          </a:xfrm>
+          <a:prstGeom prst="rect">
+            <a:avLst/>
+          </a:prstGeom>
+          <a:noFill/>
+          <a:ln/>
+        </p:spPr>
+        <p:txBody>
+          <a:bodyPr wrap="square" lIns="0" tIns="0" rIns="0" bIns="0" rtlCol="0" anchor="t"/>
+          <a:lstStyle/>
+          <a:p>
+            <a:pPr algn="l" indent="0" marL="0">
+              <a:spcAft>
+                <a:spcPts val="800"/>
+              </a:spcAft>
+              <a:buNone/>
+            </a:pPr>
+            <a:r>
+              <a:rPr lang="en-US" sz="4000" i="1" dirty="0">
+                <a:solidFill>
+                  <a:srgbClr val="111111"/>
+                </a:solidFill>
+                <a:latin typeface="Times New Roman" pitchFamily="34" charset="0"/>
+                <a:ea typeface="Times New Roman" pitchFamily="34" charset="-122"/>
+                <a:cs typeface="Times New Roman" pitchFamily="34" charset="-120"/>
+              </a:rPr>
+              <a:t>AICs dominate world trade for the following reasons:</a:t>
+            </a:r>
+            <a:endParaRPr lang="en-US" sz="4000" dirty="0"/>
+          </a:p>
+          <a:p>
+            <a:pPr algn="l" indent="0" marL="0">
+              <a:spcAft>
+                <a:spcPts val="800"/>
+              </a:spcAft>
+              <a:buNone/>
+            </a:pPr>
+            <a:r>
+              <a:rPr lang="en-US" sz="4000" b="1" dirty="0">
+                <a:solidFill>
+                  <a:srgbClr val="111111"/>
+                </a:solidFill>
+                <a:latin typeface="Times New Roman" pitchFamily="34" charset="0"/>
+                <a:ea typeface="Times New Roman" pitchFamily="34" charset="-122"/>
+                <a:cs typeface="Times New Roman" pitchFamily="34" charset="-120"/>
+              </a:rPr>
+              <a:t>Valuable goods: </a:t>
+            </a:r>
+            <a:pPr algn="l" indent="0" marL="0">
+              <a:spcAft>
+                <a:spcPts val="800"/>
+              </a:spcAft>
+              <a:buNone/>
+            </a:pPr>
+            <a:r>
+              <a:rPr lang="en-US" sz="4000" dirty="0">
+                <a:solidFill>
+                  <a:srgbClr val="111111"/>
+                </a:solidFill>
+                <a:latin typeface="Times New Roman" pitchFamily="34" charset="0"/>
+                <a:ea typeface="Times New Roman" pitchFamily="34" charset="-122"/>
+                <a:cs typeface="Times New Roman" pitchFamily="34" charset="-120"/>
+              </a:rPr>
+              <a:t>They export manufactured goods and services.</a:t>
+            </a:r>
+            <a:endParaRPr lang="en-US" sz="4000" dirty="0"/>
+          </a:p>
+          <a:p>
+            <a:pPr algn="l" indent="0" marL="0">
+              <a:spcAft>
+                <a:spcPts val="800"/>
+              </a:spcAft>
+              <a:buNone/>
+            </a:pPr>
+            <a:r>
+              <a:rPr lang="en-US" sz="4000" b="1" dirty="0">
+                <a:solidFill>
+                  <a:srgbClr val="111111"/>
+                </a:solidFill>
+                <a:latin typeface="Times New Roman" pitchFamily="34" charset="0"/>
+                <a:ea typeface="Times New Roman" pitchFamily="34" charset="-122"/>
+                <a:cs typeface="Times New Roman" pitchFamily="34" charset="-120"/>
+              </a:rPr>
+              <a:t>Capital: </a:t>
+            </a:r>
+            <a:pPr algn="l" indent="0" marL="0">
+              <a:spcAft>
+                <a:spcPts val="800"/>
+              </a:spcAft>
+              <a:buNone/>
+            </a:pPr>
+            <a:r>
+              <a:rPr lang="en-US" sz="4000" dirty="0">
+                <a:solidFill>
+                  <a:srgbClr val="111111"/>
+                </a:solidFill>
+                <a:latin typeface="Times New Roman" pitchFamily="34" charset="0"/>
+                <a:ea typeface="Times New Roman" pitchFamily="34" charset="-122"/>
+                <a:cs typeface="Times New Roman" pitchFamily="34" charset="-120"/>
+              </a:rPr>
+              <a:t>They have money to invest.</a:t>
+            </a:r>
+            <a:endParaRPr lang="en-US" sz="4000" dirty="0"/>
           </a:p>
         </p:txBody>
       </p:sp>
@@ -15025,7 +15362,7 @@
                 <a:ea typeface="Calibri" pitchFamily="34" charset="-122"/>
                 <a:cs typeface="Calibri" pitchFamily="34" charset="-120"/>
               </a:rPr>
-              <a:t>FORMATIVE EVALUATION</a:t>
+              <a:t>BOARD SUMMARY</a:t>
             </a:r>
             <a:endParaRPr lang="en-US" sz="1400" dirty="0"/>
           </a:p>
@@ -15090,7 +15427,7 @@
                 <a:ea typeface="Times New Roman" pitchFamily="34" charset="-122"/>
                 <a:cs typeface="Times New Roman" pitchFamily="34" charset="-120"/>
               </a:rPr>
-              <a:t>Evaluation 1</a:t>
+              <a:t>2. Major Trade Routes and Global Patterns</a:t>
             </a:r>
             <a:endParaRPr lang="en-US" sz="3600" dirty="0"/>
           </a:p>
@@ -15104,8 +15441,47 @@
         </p:nvSpPr>
         <p:spPr>
           <a:xfrm>
-            <a:off x="5349240" y="1783080"/>
-            <a:ext cx="6522415" cy="4663440"/>
+            <a:off x="5349240" y="1737360"/>
+            <a:ext cx="6522415" cy="457200"/>
+          </a:xfrm>
+          <a:prstGeom prst="rect">
+            <a:avLst/>
+          </a:prstGeom>
+          <a:noFill/>
+          <a:ln/>
+        </p:spPr>
+        <p:txBody>
+          <a:bodyPr wrap="square" lIns="0" tIns="0" rIns="0" bIns="0" rtlCol="0" anchor="ctr"/>
+          <a:lstStyle/>
+          <a:p>
+            <a:pPr algn="l" indent="0" marL="0">
+              <a:buNone/>
+            </a:pPr>
+            <a:r>
+              <a:rPr lang="en-US" sz="2100" b="1" dirty="0">
+                <a:solidFill>
+                  <a:srgbClr val="990011"/>
+                </a:solidFill>
+                <a:latin typeface="Times New Roman" pitchFamily="34" charset="0"/>
+                <a:ea typeface="Times New Roman" pitchFamily="34" charset="-122"/>
+                <a:cs typeface="Times New Roman" pitchFamily="34" charset="-120"/>
+              </a:rPr>
+              <a:t>B) Reasons for the Dominance of AICs (continued)</a:t>
+            </a:r>
+            <a:endParaRPr lang="en-US" sz="2100" dirty="0"/>
+          </a:p>
+        </p:txBody>
+      </p:sp>
+      <p:sp>
+        <p:nvSpPr>
+          <p:cNvPr id="6" name="Text 3"/>
+          <p:cNvSpPr/>
+          <p:nvPr/>
+        </p:nvSpPr>
+        <p:spPr>
+          <a:xfrm>
+            <a:off x="5349240" y="2240280"/>
+            <a:ext cx="6522415" cy="4206240"/>
           </a:xfrm>
           <a:prstGeom prst="rect">
             <a:avLst/>
@@ -15124,7 +15500,7 @@
               <a:buNone/>
             </a:pPr>
             <a:r>
-              <a:rPr lang="en-US" sz="4000" dirty="0">
+              <a:rPr lang="en-US" sz="4000" b="1" dirty="0">
                 <a:solidFill>
                   <a:srgbClr val="111111"/>
                 </a:solidFill>
@@ -15132,7 +15508,24 @@
                 <a:ea typeface="Times New Roman" pitchFamily="34" charset="-122"/>
                 <a:cs typeface="Times New Roman" pitchFamily="34" charset="-120"/>
               </a:rPr>
-              <a:t>Define international trade.</a:t>
+              <a:t>Control of transport and markets: </a:t>
+            </a:r>
+            <a:pPr algn="l" indent="0" marL="0">
+              <a:spcAft>
+                <a:spcPts val="800"/>
+              </a:spcAft>
+              <a:buNone/>
+            </a:pPr>
+            <a:r>
+              <a:rPr lang="en-US" sz="4000" dirty="0">
+                <a:solidFill>
+                  <a:srgbClr val="111111"/>
+                </a:solidFill>
+                <a:latin typeface="Times New Roman" pitchFamily="34" charset="0"/>
+                <a:ea typeface="Times New Roman" pitchFamily="34" charset="-122"/>
+                <a:cs typeface="Times New Roman" pitchFamily="34" charset="-120"/>
+              </a:rPr>
+              <a:t>They own ships, banks and markets.</a:t>
             </a:r>
             <a:endParaRPr lang="en-US" sz="4000" dirty="0"/>
           </a:p>
@@ -15244,15 +15637,54 @@
                 <a:ea typeface="Calibri" pitchFamily="34" charset="-122"/>
                 <a:cs typeface="Calibri" pitchFamily="34" charset="-120"/>
               </a:rPr>
-              <a:t>FORMATIVE EVALUATION</a:t>
+              <a:t>BOARD SUMMARY</a:t>
             </a:r>
             <a:endParaRPr lang="en-US" sz="1400" dirty="0"/>
+          </a:p>
+        </p:txBody>
+      </p:sp>
+      <p:sp>
+        <p:nvSpPr>
+          <p:cNvPr id="3" name="Text 1"/>
+          <p:cNvSpPr/>
+          <p:nvPr/>
+        </p:nvSpPr>
+        <p:spPr>
+          <a:xfrm>
+            <a:off x="457200" y="1005840"/>
+            <a:ext cx="11277295" cy="731520"/>
+          </a:xfrm>
+          <a:prstGeom prst="rect">
+            <a:avLst/>
+          </a:prstGeom>
+          <a:noFill/>
+          <a:ln/>
+        </p:spPr>
+        <p:txBody>
+          <a:bodyPr wrap="square" lIns="0" tIns="0" rIns="0" bIns="0" rtlCol="0" anchor="ctr"/>
+          <a:lstStyle/>
+          <a:p>
+            <a:pPr algn="ctr" indent="0" marL="0">
+              <a:buNone/>
+            </a:pPr>
+            <a:r>
+              <a:rPr lang="en-US" sz="3600" b="1" dirty="0">
+                <a:solidFill>
+                  <a:srgbClr val="990011"/>
+                </a:solidFill>
+                <a:latin typeface="Times New Roman" pitchFamily="34" charset="0"/>
+                <a:ea typeface="Times New Roman" pitchFamily="34" charset="-122"/>
+                <a:cs typeface="Times New Roman" pitchFamily="34" charset="-120"/>
+              </a:rPr>
+              <a:t>2. Major Trade Routes and Global Patterns</a:t>
+            </a:r>
+            <a:endParaRPr lang="en-US" sz="3600" dirty="0"/>
           </a:p>
         </p:txBody>
       </p:sp>
       <p:pic>
         <p:nvPicPr>
-          <p:cNvPr id="3" name="Image 0" descr="/home/claude/f4/img/minesec_sheet.png">    </p:cNvPr>
+          <p:cNvPr id="4" name="Image 0" descr="/home/claude/f4/img/v2/triad_big.png">    </p:cNvPr>
           <p:cNvPicPr>
             <a:picLocks noChangeAspect="1"/>
           </p:cNvPicPr>
@@ -15266,8 +15698,8 @@
         </p:blipFill>
         <p:spPr>
           <a:xfrm>
-            <a:off x="0" y="658368"/>
-            <a:ext cx="5120640" cy="5833872"/>
+            <a:off x="1825600" y="1783080"/>
+            <a:ext cx="8540496" cy="4270248"/>
           </a:xfrm>
           <a:prstGeom prst="rect">
             <a:avLst/>
@@ -15276,14 +15708,14 @@
       </p:pic>
       <p:sp>
         <p:nvSpPr>
-          <p:cNvPr id="4" name="Text 1"/>
+          <p:cNvPr id="5" name="Text 2"/>
           <p:cNvSpPr/>
           <p:nvPr/>
         </p:nvSpPr>
         <p:spPr>
           <a:xfrm>
-            <a:off x="5349240" y="1005840"/>
-            <a:ext cx="6522415" cy="731520"/>
+            <a:off x="457200" y="6089904"/>
+            <a:ext cx="11277295" cy="347472"/>
           </a:xfrm>
           <a:prstGeom prst="rect">
             <a:avLst/>
@@ -15292,68 +15724,24 @@
           <a:ln/>
         </p:spPr>
         <p:txBody>
-          <a:bodyPr wrap="square" lIns="0" tIns="0" rIns="0" bIns="0" rtlCol="0" anchor="ctr">
-            <a:normAutofit/>
-          </a:bodyPr>
+          <a:bodyPr wrap="square" lIns="0" tIns="0" rIns="0" bIns="0" rtlCol="0" anchor="ctr"/>
           <a:lstStyle/>
           <a:p>
             <a:pPr algn="ctr" indent="0" marL="0">
               <a:buNone/>
             </a:pPr>
             <a:r>
-              <a:rPr lang="en-US" sz="3600" b="1" dirty="0">
-                <a:solidFill>
-                  <a:srgbClr val="990011"/>
+              <a:rPr lang="en-US" sz="1800" i="1" dirty="0">
+                <a:solidFill>
+                  <a:srgbClr val="555555"/>
                 </a:solidFill>
                 <a:latin typeface="Times New Roman" pitchFamily="34" charset="0"/>
                 <a:ea typeface="Times New Roman" pitchFamily="34" charset="-122"/>
                 <a:cs typeface="Times New Roman" pitchFamily="34" charset="-120"/>
               </a:rPr>
-              <a:t>Expected Answer</a:t>
-            </a:r>
-            <a:endParaRPr lang="en-US" sz="3600" dirty="0"/>
-          </a:p>
-        </p:txBody>
-      </p:sp>
-      <p:sp>
-        <p:nvSpPr>
-          <p:cNvPr id="5" name="Text 2"/>
-          <p:cNvSpPr/>
-          <p:nvPr/>
-        </p:nvSpPr>
-        <p:spPr>
-          <a:xfrm>
-            <a:off x="5349240" y="1783080"/>
-            <a:ext cx="6522415" cy="4663440"/>
-          </a:xfrm>
-          <a:prstGeom prst="rect">
-            <a:avLst/>
-          </a:prstGeom>
-          <a:noFill/>
-          <a:ln/>
-        </p:spPr>
-        <p:txBody>
-          <a:bodyPr wrap="square" lIns="0" tIns="0" rIns="0" bIns="0" rtlCol="0" anchor="t"/>
-          <a:lstStyle/>
-          <a:p>
-            <a:pPr algn="l" indent="0" marL="0">
-              <a:spcAft>
-                <a:spcPts val="800"/>
-              </a:spcAft>
-              <a:buNone/>
-            </a:pPr>
-            <a:r>
-              <a:rPr lang="en-US" sz="4000" dirty="0">
-                <a:solidFill>
-                  <a:srgbClr val="111111"/>
-                </a:solidFill>
-                <a:latin typeface="Times New Roman" pitchFamily="34" charset="0"/>
-                <a:ea typeface="Times New Roman" pitchFamily="34" charset="-122"/>
-                <a:cs typeface="Times New Roman" pitchFamily="34" charset="-120"/>
-              </a:rPr>
-              <a:t>Trade between countries.</a:t>
-            </a:r>
-            <a:endParaRPr lang="en-US" sz="4000" dirty="0"/>
+              <a:t>Illustration: the world economic triad</a:t>
+            </a:r>
+            <a:endParaRPr lang="en-US" sz="1800" dirty="0"/>
           </a:p>
         </p:txBody>
       </p:sp>
@@ -15528,7 +15916,7 @@
                 <a:ea typeface="Times New Roman" pitchFamily="34" charset="-122"/>
                 <a:cs typeface="Times New Roman" pitchFamily="34" charset="-120"/>
               </a:rPr>
-              <a:t>Evaluation 2</a:t>
+              <a:t>Evaluation 1</a:t>
             </a:r>
             <a:endParaRPr lang="en-US" sz="3600" dirty="0"/>
           </a:p>
@@ -15570,7 +15958,7 @@
                 <a:ea typeface="Times New Roman" pitchFamily="34" charset="-122"/>
                 <a:cs typeface="Times New Roman" pitchFamily="34" charset="-120"/>
               </a:rPr>
-              <a:t>Give two reasons for the dominance of AICs in world trade.</a:t>
+              <a:t>Define international trade.</a:t>
             </a:r>
             <a:endParaRPr lang="en-US" sz="4000" dirty="0"/>
           </a:p>
@@ -15789,7 +16177,7 @@
                 <a:ea typeface="Times New Roman" pitchFamily="34" charset="-122"/>
                 <a:cs typeface="Times New Roman" pitchFamily="34" charset="-120"/>
               </a:rPr>
-              <a:t>They export manufactured goods and control transport and finance.</a:t>
+              <a:t>Trade between countries.</a:t>
             </a:r>
             <a:endParaRPr lang="en-US" sz="4000" dirty="0"/>
           </a:p>
@@ -15901,7 +16289,7 @@
                 <a:ea typeface="Calibri" pitchFamily="34" charset="-122"/>
                 <a:cs typeface="Calibri" pitchFamily="34" charset="-120"/>
               </a:rPr>
-              <a:t>REMEDIATION</a:t>
+              <a:t>FORMATIVE EVALUATION</a:t>
             </a:r>
             <a:endParaRPr lang="en-US" sz="1400" dirty="0"/>
           </a:p>
@@ -15924,7 +16312,7 @@
         <p:spPr>
           <a:xfrm>
             <a:off x="0" y="658368"/>
-            <a:ext cx="3840480" cy="5833872"/>
+            <a:ext cx="5120640" cy="5833872"/>
           </a:xfrm>
           <a:prstGeom prst="rect">
             <a:avLst/>
@@ -15939,8 +16327,8 @@
         </p:nvSpPr>
         <p:spPr>
           <a:xfrm>
-            <a:off x="4069080" y="1005840"/>
-            <a:ext cx="7802575" cy="731520"/>
+            <a:off x="5349240" y="1005840"/>
+            <a:ext cx="6522415" cy="731520"/>
           </a:xfrm>
           <a:prstGeom prst="rect">
             <a:avLst/>
@@ -15966,7 +16354,7 @@
                 <a:ea typeface="Times New Roman" pitchFamily="34" charset="-122"/>
                 <a:cs typeface="Times New Roman" pitchFamily="34" charset="-120"/>
               </a:rPr>
-              <a:t>Remediation</a:t>
+              <a:t>Evaluation 2</a:t>
             </a:r>
             <a:endParaRPr lang="en-US" sz="3600" dirty="0"/>
           </a:p>
@@ -15980,8 +16368,8 @@
         </p:nvSpPr>
         <p:spPr>
           <a:xfrm>
-            <a:off x="4069080" y="1783080"/>
-            <a:ext cx="7802575" cy="4663440"/>
+            <a:off x="5349240" y="1783080"/>
+            <a:ext cx="6522415" cy="4663440"/>
           </a:xfrm>
           <a:prstGeom prst="rect">
             <a:avLst/>
@@ -16000,7 +16388,7 @@
               <a:buNone/>
             </a:pPr>
             <a:r>
-              <a:rPr lang="en-US" sz="4000" b="1" dirty="0">
+              <a:rPr lang="en-US" sz="4000" dirty="0">
                 <a:solidFill>
                   <a:srgbClr val="111111"/>
                 </a:solidFill>
@@ -16008,73 +16396,7 @@
                 <a:ea typeface="Times New Roman" pitchFamily="34" charset="-122"/>
                 <a:cs typeface="Times New Roman" pitchFamily="34" charset="-120"/>
               </a:rPr>
-              <a:t>Fill in the blanks:</a:t>
-            </a:r>
-            <a:endParaRPr lang="en-US" sz="4000" dirty="0"/>
-          </a:p>
-          <a:p>
-            <a:pPr algn="l" marL="342900" indent="-342900">
-              <a:spcAft>
-                <a:spcPts val="800"/>
-              </a:spcAft>
-              <a:buSzPct val="100000"/>
-              <a:buFont typeface="+mj-lt"/>
-              <a:buAutoNum type="arabicPeriod" startAt="1"/>
-            </a:pPr>
-            <a:r>
-              <a:rPr lang="en-US" sz="4000" dirty="0">
-                <a:solidFill>
-                  <a:srgbClr val="111111"/>
-                </a:solidFill>
-                <a:latin typeface="Times New Roman" pitchFamily="34" charset="0"/>
-                <a:ea typeface="Times New Roman" pitchFamily="34" charset="-122"/>
-                <a:cs typeface="Times New Roman" pitchFamily="34" charset="-120"/>
-              </a:rPr>
-              <a:t>Goods sold abroad are ______.</a:t>
-            </a:r>
-            <a:endParaRPr lang="en-US" sz="4000" dirty="0"/>
-          </a:p>
-          <a:p>
-            <a:pPr algn="l" marL="342900" indent="-342900">
-              <a:spcAft>
-                <a:spcPts val="800"/>
-              </a:spcAft>
-              <a:buSzPct val="100000"/>
-              <a:buFont typeface="+mj-lt"/>
-              <a:buAutoNum type="arabicPeriod" startAt="1"/>
-            </a:pPr>
-            <a:r>
-              <a:rPr lang="en-US" sz="4000" dirty="0">
-                <a:solidFill>
-                  <a:srgbClr val="111111"/>
-                </a:solidFill>
-                <a:latin typeface="Times New Roman" pitchFamily="34" charset="0"/>
-                <a:ea typeface="Times New Roman" pitchFamily="34" charset="-122"/>
-                <a:cs typeface="Times New Roman" pitchFamily="34" charset="-120"/>
-              </a:rPr>
-              <a:t>Trade within a country is ______ trade.</a:t>
-            </a:r>
-            <a:endParaRPr lang="en-US" sz="4000" dirty="0"/>
-          </a:p>
-          <a:p>
-            <a:pPr algn="l" marL="342900" indent="-342900">
-              <a:spcAft>
-                <a:spcPts val="800"/>
-              </a:spcAft>
-              <a:buSzPct val="100000"/>
-              <a:buFont typeface="+mj-lt"/>
-              <a:buAutoNum type="arabicPeriod" startAt="1"/>
-            </a:pPr>
-            <a:r>
-              <a:rPr lang="en-US" sz="4000" dirty="0">
-                <a:solidFill>
-                  <a:srgbClr val="111111"/>
-                </a:solidFill>
-                <a:latin typeface="Times New Roman" pitchFamily="34" charset="0"/>
-                <a:ea typeface="Times New Roman" pitchFamily="34" charset="-122"/>
-                <a:cs typeface="Times New Roman" pitchFamily="34" charset="-120"/>
-              </a:rPr>
-              <a:t>The busiest trade route is the North ______ route.</a:t>
+              <a:t>Give two reasons for the dominance of AICs in world trade.</a:t>
             </a:r>
             <a:endParaRPr lang="en-US" sz="4000" dirty="0"/>
           </a:p>
@@ -16186,7 +16508,7 @@
                 <a:ea typeface="Calibri" pitchFamily="34" charset="-122"/>
                 <a:cs typeface="Calibri" pitchFamily="34" charset="-120"/>
               </a:rPr>
-              <a:t>HOMEWORK</a:t>
+              <a:t>FORMATIVE EVALUATION</a:t>
             </a:r>
             <a:endParaRPr lang="en-US" sz="1400" dirty="0"/>
           </a:p>
@@ -16251,7 +16573,7 @@
                 <a:ea typeface="Times New Roman" pitchFamily="34" charset="-122"/>
                 <a:cs typeface="Times New Roman" pitchFamily="34" charset="-120"/>
               </a:rPr>
-              <a:t>Homework</a:t>
+              <a:t>Expected Answer</a:t>
             </a:r>
             <a:endParaRPr lang="en-US" sz="3600" dirty="0"/>
           </a:p>
@@ -16293,7 +16615,7 @@
                 <a:ea typeface="Times New Roman" pitchFamily="34" charset="-122"/>
                 <a:cs typeface="Times New Roman" pitchFamily="34" charset="-120"/>
               </a:rPr>
-              <a:t>List three exports and three imports of Cameroon.</a:t>
+              <a:t>They export manufactured goods and control transport and finance.</a:t>
             </a:r>
             <a:endParaRPr lang="en-US" sz="4000" dirty="0"/>
           </a:p>
@@ -16405,7 +16727,7 @@
                 <a:ea typeface="Calibri" pitchFamily="34" charset="-122"/>
                 <a:cs typeface="Calibri" pitchFamily="34" charset="-120"/>
               </a:rPr>
-              <a:t>NEXT LESSON</a:t>
+              <a:t>REMEDIATION</a:t>
             </a:r>
             <a:endParaRPr lang="en-US" sz="1400" dirty="0"/>
           </a:p>
@@ -16428,7 +16750,7 @@
         <p:spPr>
           <a:xfrm>
             <a:off x="0" y="658368"/>
-            <a:ext cx="5120640" cy="5833872"/>
+            <a:ext cx="3840480" cy="5833872"/>
           </a:xfrm>
           <a:prstGeom prst="rect">
             <a:avLst/>
@@ -16443,8 +16765,8 @@
         </p:nvSpPr>
         <p:spPr>
           <a:xfrm>
-            <a:off x="5349240" y="1005840"/>
-            <a:ext cx="6522415" cy="731520"/>
+            <a:off x="4069080" y="1005840"/>
+            <a:ext cx="7802575" cy="731520"/>
           </a:xfrm>
           <a:prstGeom prst="rect">
             <a:avLst/>
@@ -16470,7 +16792,7 @@
                 <a:ea typeface="Times New Roman" pitchFamily="34" charset="-122"/>
                 <a:cs typeface="Times New Roman" pitchFamily="34" charset="-120"/>
               </a:rPr>
-              <a:t>Next Lesson</a:t>
+              <a:t>Remediation</a:t>
             </a:r>
             <a:endParaRPr lang="en-US" sz="3600" dirty="0"/>
           </a:p>
@@ -16484,8 +16806,8 @@
         </p:nvSpPr>
         <p:spPr>
           <a:xfrm>
-            <a:off x="5349240" y="1783080"/>
-            <a:ext cx="6522415" cy="4663440"/>
+            <a:off x="4069080" y="1783080"/>
+            <a:ext cx="7802575" cy="4663440"/>
           </a:xfrm>
           <a:prstGeom prst="rect">
             <a:avLst/>
@@ -16494,10 +16816,10 @@
           <a:ln/>
         </p:spPr>
         <p:txBody>
-          <a:bodyPr wrap="square" lIns="0" tIns="0" rIns="0" bIns="0" rtlCol="0" anchor="ctr"/>
-          <a:lstStyle/>
-          <a:p>
-            <a:pPr algn="ctr" indent="0" marL="0">
+          <a:bodyPr wrap="square" lIns="0" tIns="0" rIns="0" bIns="0" rtlCol="0" anchor="t"/>
+          <a:lstStyle/>
+          <a:p>
+            <a:pPr algn="l" indent="0" marL="0">
               <a:spcAft>
                 <a:spcPts val="800"/>
               </a:spcAft>
@@ -16512,27 +16834,73 @@
                 <a:ea typeface="Times New Roman" pitchFamily="34" charset="-122"/>
                 <a:cs typeface="Times New Roman" pitchFamily="34" charset="-120"/>
               </a:rPr>
-              <a:t>Our next lesson will be on:</a:t>
+              <a:t>Fill in the blanks:</a:t>
             </a:r>
             <a:endParaRPr lang="en-US" sz="4000" dirty="0"/>
           </a:p>
           <a:p>
-            <a:pPr algn="ctr" indent="0" marL="0">
+            <a:pPr algn="l" marL="342900" indent="-342900">
               <a:spcAft>
                 <a:spcPts val="800"/>
               </a:spcAft>
-              <a:buNone/>
+              <a:buSzPct val="100000"/>
+              <a:buFont typeface="+mj-lt"/>
+              <a:buAutoNum type="arabicPeriod" startAt="1"/>
             </a:pPr>
             <a:r>
-              <a:rPr lang="en-US" sz="4000" b="1" dirty="0">
-                <a:solidFill>
-                  <a:srgbClr val="990011"/>
+              <a:rPr lang="en-US" sz="4000" dirty="0">
+                <a:solidFill>
+                  <a:srgbClr val="111111"/>
                 </a:solidFill>
                 <a:latin typeface="Times New Roman" pitchFamily="34" charset="0"/>
                 <a:ea typeface="Times New Roman" pitchFamily="34" charset="-122"/>
                 <a:cs typeface="Times New Roman" pitchFamily="34" charset="-120"/>
               </a:rPr>
-              <a:t>Lesson 18: Trade Blocs</a:t>
+              <a:t>Goods sold abroad are ______.</a:t>
+            </a:r>
+            <a:endParaRPr lang="en-US" sz="4000" dirty="0"/>
+          </a:p>
+          <a:p>
+            <a:pPr algn="l" marL="342900" indent="-342900">
+              <a:spcAft>
+                <a:spcPts val="800"/>
+              </a:spcAft>
+              <a:buSzPct val="100000"/>
+              <a:buFont typeface="+mj-lt"/>
+              <a:buAutoNum type="arabicPeriod" startAt="1"/>
+            </a:pPr>
+            <a:r>
+              <a:rPr lang="en-US" sz="4000" dirty="0">
+                <a:solidFill>
+                  <a:srgbClr val="111111"/>
+                </a:solidFill>
+                <a:latin typeface="Times New Roman" pitchFamily="34" charset="0"/>
+                <a:ea typeface="Times New Roman" pitchFamily="34" charset="-122"/>
+                <a:cs typeface="Times New Roman" pitchFamily="34" charset="-120"/>
+              </a:rPr>
+              <a:t>Trade within a country is ______ trade.</a:t>
+            </a:r>
+            <a:endParaRPr lang="en-US" sz="4000" dirty="0"/>
+          </a:p>
+          <a:p>
+            <a:pPr algn="l" marL="342900" indent="-342900">
+              <a:spcAft>
+                <a:spcPts val="800"/>
+              </a:spcAft>
+              <a:buSzPct val="100000"/>
+              <a:buFont typeface="+mj-lt"/>
+              <a:buAutoNum type="arabicPeriod" startAt="1"/>
+            </a:pPr>
+            <a:r>
+              <a:rPr lang="en-US" sz="4000" dirty="0">
+                <a:solidFill>
+                  <a:srgbClr val="111111"/>
+                </a:solidFill>
+                <a:latin typeface="Times New Roman" pitchFamily="34" charset="0"/>
+                <a:ea typeface="Times New Roman" pitchFamily="34" charset="-122"/>
+                <a:cs typeface="Times New Roman" pitchFamily="34" charset="-120"/>
+              </a:rPr>
+              <a:t>The busiest trade route is the North ______ route.</a:t>
             </a:r>
             <a:endParaRPr lang="en-US" sz="4000" dirty="0"/>
           </a:p>
@@ -16644,6 +17012,464 @@
                 <a:ea typeface="Calibri" pitchFamily="34" charset="-122"/>
                 <a:cs typeface="Calibri" pitchFamily="34" charset="-120"/>
               </a:rPr>
+              <a:t>HOMEWORK</a:t>
+            </a:r>
+            <a:endParaRPr lang="en-US" sz="1400" dirty="0"/>
+          </a:p>
+        </p:txBody>
+      </p:sp>
+      <p:pic>
+        <p:nvPicPr>
+          <p:cNvPr id="3" name="Image 0" descr="/home/claude/f4/img/minesec_sheet.png">    </p:cNvPr>
+          <p:cNvPicPr>
+            <a:picLocks noChangeAspect="1"/>
+          </p:cNvPicPr>
+          <p:nvPr/>
+        </p:nvPicPr>
+        <p:blipFill>
+          <a:blip r:embed="rId1"/>
+          <a:stretch>
+            <a:fillRect/>
+          </a:stretch>
+        </p:blipFill>
+        <p:spPr>
+          <a:xfrm>
+            <a:off x="0" y="658368"/>
+            <a:ext cx="5120640" cy="5833872"/>
+          </a:xfrm>
+          <a:prstGeom prst="rect">
+            <a:avLst/>
+          </a:prstGeom>
+        </p:spPr>
+      </p:pic>
+      <p:sp>
+        <p:nvSpPr>
+          <p:cNvPr id="4" name="Text 1"/>
+          <p:cNvSpPr/>
+          <p:nvPr/>
+        </p:nvSpPr>
+        <p:spPr>
+          <a:xfrm>
+            <a:off x="5349240" y="1005840"/>
+            <a:ext cx="6522415" cy="731520"/>
+          </a:xfrm>
+          <a:prstGeom prst="rect">
+            <a:avLst/>
+          </a:prstGeom>
+          <a:noFill/>
+          <a:ln/>
+        </p:spPr>
+        <p:txBody>
+          <a:bodyPr wrap="square" lIns="0" tIns="0" rIns="0" bIns="0" rtlCol="0" anchor="ctr">
+            <a:normAutofit/>
+          </a:bodyPr>
+          <a:lstStyle/>
+          <a:p>
+            <a:pPr algn="ctr" indent="0" marL="0">
+              <a:buNone/>
+            </a:pPr>
+            <a:r>
+              <a:rPr lang="en-US" sz="3600" b="1" dirty="0">
+                <a:solidFill>
+                  <a:srgbClr val="990011"/>
+                </a:solidFill>
+                <a:latin typeface="Times New Roman" pitchFamily="34" charset="0"/>
+                <a:ea typeface="Times New Roman" pitchFamily="34" charset="-122"/>
+                <a:cs typeface="Times New Roman" pitchFamily="34" charset="-120"/>
+              </a:rPr>
+              <a:t>Homework</a:t>
+            </a:r>
+            <a:endParaRPr lang="en-US" sz="3600" dirty="0"/>
+          </a:p>
+        </p:txBody>
+      </p:sp>
+      <p:sp>
+        <p:nvSpPr>
+          <p:cNvPr id="5" name="Text 2"/>
+          <p:cNvSpPr/>
+          <p:nvPr/>
+        </p:nvSpPr>
+        <p:spPr>
+          <a:xfrm>
+            <a:off x="5349240" y="1783080"/>
+            <a:ext cx="6522415" cy="4663440"/>
+          </a:xfrm>
+          <a:prstGeom prst="rect">
+            <a:avLst/>
+          </a:prstGeom>
+          <a:noFill/>
+          <a:ln/>
+        </p:spPr>
+        <p:txBody>
+          <a:bodyPr wrap="square" lIns="0" tIns="0" rIns="0" bIns="0" rtlCol="0" anchor="t"/>
+          <a:lstStyle/>
+          <a:p>
+            <a:pPr algn="l" indent="0" marL="0">
+              <a:spcAft>
+                <a:spcPts val="800"/>
+              </a:spcAft>
+              <a:buNone/>
+            </a:pPr>
+            <a:r>
+              <a:rPr lang="en-US" sz="4000" dirty="0">
+                <a:solidFill>
+                  <a:srgbClr val="111111"/>
+                </a:solidFill>
+                <a:latin typeface="Times New Roman" pitchFamily="34" charset="0"/>
+                <a:ea typeface="Times New Roman" pitchFamily="34" charset="-122"/>
+                <a:cs typeface="Times New Roman" pitchFamily="34" charset="-120"/>
+              </a:rPr>
+              <a:t>List three exports and three imports of Cameroon.</a:t>
+            </a:r>
+            <a:endParaRPr lang="en-US" sz="4000" dirty="0"/>
+          </a:p>
+        </p:txBody>
+      </p:sp>
+      <p:sp>
+        <p:nvSpPr>
+          <p:cNvPr id="25" name="Slide Number Placeholder 0"/>
+          <p:cNvSpPr>
+            <a:spLocks noGrp="1"/>
+          </p:cNvSpPr>
+          <p:nvPr>
+            <p:ph type="sldNum" sz="quarter" idx="4294967295"/>
+          </p:nvPr>
+        </p:nvSpPr>
+        <p:spPr>
+          <a:xfrm>
+            <a:off x="27432" y="91440"/>
+            <a:ext cx="585216" cy="475488"/>
+          </a:xfrm>
+          <a:prstGeom prst="rect">
+            <a:avLst/>
+          </a:prstGeom>
+          <a:extLst>
+            <a:ext uri="{C572A759-6A51-4108-AA02-DFA0A04FC94B}">
+              <ma14:wrappingTextBoxFlag xmlns:ma14="http://schemas.microsoft.com/office/mac/drawingml/2011/main" val="0"/>
+            </a:ext>
+          </a:extLst>
+        </p:spPr>
+        <p:txBody>
+          <a:bodyPr/>
+          <a:lstStyle>
+            <a:lvl1pPr>
+              <a:defRPr sz="2000">
+                <a:solidFill>
+                  <a:srgbClr val="FFFFFF"/>
+                </a:solidFill>
+                <a:latin typeface="Calibri"/>
+                <a:ea typeface="Calibri"/>
+                <a:cs typeface="Calibri"/>
+              </a:defRPr>
+            </a:lvl1pPr>
+          </a:lstStyle>
+          <a:p>
+            <a:pPr algn="ctr"/>
+            <a:fld id="{F7021451-1387-4CA6-816F-3879F97B5CBC}" type="slidenum">
+              <a:rPr b="1" lang="en-US"/>
+              <a:t>47</a:t>
+            </a:fld>
+            <a:endParaRPr lang="en-US"/>
+          </a:p>
+        </p:txBody>
+      </p:sp>
+    </p:spTree>
+  </p:cSld>
+  <p:clrMapOvr>
+    <a:masterClrMapping/>
+  </p:clrMapOvr>
+</p:sld>
+</file>
+
+<file path=ppt/slides/slide48.xml><?xml version="1.0" encoding="utf-8"?>
+<p:sld xmlns:a="http://schemas.openxmlformats.org/drawingml/2006/main" xmlns:r="http://schemas.openxmlformats.org/officeDocument/2006/relationships" xmlns:p="http://schemas.openxmlformats.org/presentationml/2006/main">
+  <p:cSld name="Slide 48">
+    <p:spTree>
+      <p:nvGrpSpPr>
+        <p:cNvPr id="1" name=""/>
+        <p:cNvGrpSpPr/>
+        <p:nvPr/>
+      </p:nvGrpSpPr>
+      <p:grpSpPr>
+        <a:xfrm>
+          <a:off x="0" y="0"/>
+          <a:ext cx="0" cy="0"/>
+          <a:chOff x="0" y="0"/>
+          <a:chExt cx="0" cy="0"/>
+        </a:xfrm>
+      </p:grpSpPr>
+      <p:sp>
+        <p:nvSpPr>
+          <p:cNvPr id="2" name="Text 0"/>
+          <p:cNvSpPr/>
+          <p:nvPr/>
+        </p:nvSpPr>
+        <p:spPr>
+          <a:xfrm>
+            <a:off x="457200" y="713232"/>
+            <a:ext cx="11368735" cy="274320"/>
+          </a:xfrm>
+          <a:prstGeom prst="rect">
+            <a:avLst/>
+          </a:prstGeom>
+          <a:noFill/>
+          <a:ln/>
+        </p:spPr>
+        <p:txBody>
+          <a:bodyPr wrap="square" lIns="0" tIns="0" rIns="0" bIns="0" rtlCol="0" anchor="ctr"/>
+          <a:lstStyle/>
+          <a:p>
+            <a:pPr algn="r" indent="0" marL="0">
+              <a:buNone/>
+            </a:pPr>
+            <a:r>
+              <a:rPr lang="en-US" sz="1400" b="1" dirty="0">
+                <a:solidFill>
+                  <a:srgbClr val="1C3F6E"/>
+                </a:solidFill>
+                <a:latin typeface="Calibri" pitchFamily="34" charset="0"/>
+                <a:ea typeface="Calibri" pitchFamily="34" charset="-122"/>
+                <a:cs typeface="Calibri" pitchFamily="34" charset="-120"/>
+              </a:rPr>
+              <a:t>NEXT LESSON</a:t>
+            </a:r>
+            <a:endParaRPr lang="en-US" sz="1400" dirty="0"/>
+          </a:p>
+        </p:txBody>
+      </p:sp>
+      <p:pic>
+        <p:nvPicPr>
+          <p:cNvPr id="3" name="Image 0" descr="/home/claude/f4/img/minesec_sheet.png">    </p:cNvPr>
+          <p:cNvPicPr>
+            <a:picLocks noChangeAspect="1"/>
+          </p:cNvPicPr>
+          <p:nvPr/>
+        </p:nvPicPr>
+        <p:blipFill>
+          <a:blip r:embed="rId1"/>
+          <a:stretch>
+            <a:fillRect/>
+          </a:stretch>
+        </p:blipFill>
+        <p:spPr>
+          <a:xfrm>
+            <a:off x="0" y="658368"/>
+            <a:ext cx="5120640" cy="5833872"/>
+          </a:xfrm>
+          <a:prstGeom prst="rect">
+            <a:avLst/>
+          </a:prstGeom>
+        </p:spPr>
+      </p:pic>
+      <p:sp>
+        <p:nvSpPr>
+          <p:cNvPr id="4" name="Text 1"/>
+          <p:cNvSpPr/>
+          <p:nvPr/>
+        </p:nvSpPr>
+        <p:spPr>
+          <a:xfrm>
+            <a:off x="5349240" y="1005840"/>
+            <a:ext cx="6522415" cy="731520"/>
+          </a:xfrm>
+          <a:prstGeom prst="rect">
+            <a:avLst/>
+          </a:prstGeom>
+          <a:noFill/>
+          <a:ln/>
+        </p:spPr>
+        <p:txBody>
+          <a:bodyPr wrap="square" lIns="0" tIns="0" rIns="0" bIns="0" rtlCol="0" anchor="ctr">
+            <a:normAutofit/>
+          </a:bodyPr>
+          <a:lstStyle/>
+          <a:p>
+            <a:pPr algn="ctr" indent="0" marL="0">
+              <a:buNone/>
+            </a:pPr>
+            <a:r>
+              <a:rPr lang="en-US" sz="3600" b="1" dirty="0">
+                <a:solidFill>
+                  <a:srgbClr val="990011"/>
+                </a:solidFill>
+                <a:latin typeface="Times New Roman" pitchFamily="34" charset="0"/>
+                <a:ea typeface="Times New Roman" pitchFamily="34" charset="-122"/>
+                <a:cs typeface="Times New Roman" pitchFamily="34" charset="-120"/>
+              </a:rPr>
+              <a:t>Next Lesson</a:t>
+            </a:r>
+            <a:endParaRPr lang="en-US" sz="3600" dirty="0"/>
+          </a:p>
+        </p:txBody>
+      </p:sp>
+      <p:sp>
+        <p:nvSpPr>
+          <p:cNvPr id="5" name="Text 2"/>
+          <p:cNvSpPr/>
+          <p:nvPr/>
+        </p:nvSpPr>
+        <p:spPr>
+          <a:xfrm>
+            <a:off x="5349240" y="1783080"/>
+            <a:ext cx="6522415" cy="4663440"/>
+          </a:xfrm>
+          <a:prstGeom prst="rect">
+            <a:avLst/>
+          </a:prstGeom>
+          <a:noFill/>
+          <a:ln/>
+        </p:spPr>
+        <p:txBody>
+          <a:bodyPr wrap="square" lIns="0" tIns="0" rIns="0" bIns="0" rtlCol="0" anchor="ctr"/>
+          <a:lstStyle/>
+          <a:p>
+            <a:pPr algn="ctr" indent="0" marL="0">
+              <a:spcAft>
+                <a:spcPts val="800"/>
+              </a:spcAft>
+              <a:buNone/>
+            </a:pPr>
+            <a:r>
+              <a:rPr lang="en-US" sz="4000" b="1" dirty="0">
+                <a:solidFill>
+                  <a:srgbClr val="111111"/>
+                </a:solidFill>
+                <a:latin typeface="Times New Roman" pitchFamily="34" charset="0"/>
+                <a:ea typeface="Times New Roman" pitchFamily="34" charset="-122"/>
+                <a:cs typeface="Times New Roman" pitchFamily="34" charset="-120"/>
+              </a:rPr>
+              <a:t>Our next lesson will be on:</a:t>
+            </a:r>
+            <a:endParaRPr lang="en-US" sz="4000" dirty="0"/>
+          </a:p>
+          <a:p>
+            <a:pPr algn="ctr" indent="0" marL="0">
+              <a:spcAft>
+                <a:spcPts val="800"/>
+              </a:spcAft>
+              <a:buNone/>
+            </a:pPr>
+            <a:r>
+              <a:rPr lang="en-US" sz="4000" b="1" dirty="0">
+                <a:solidFill>
+                  <a:srgbClr val="990011"/>
+                </a:solidFill>
+                <a:latin typeface="Times New Roman" pitchFamily="34" charset="0"/>
+                <a:ea typeface="Times New Roman" pitchFamily="34" charset="-122"/>
+                <a:cs typeface="Times New Roman" pitchFamily="34" charset="-120"/>
+              </a:rPr>
+              <a:t>Lesson 18: Trade Blocs</a:t>
+            </a:r>
+            <a:endParaRPr lang="en-US" sz="4000" dirty="0"/>
+          </a:p>
+        </p:txBody>
+      </p:sp>
+      <p:sp>
+        <p:nvSpPr>
+          <p:cNvPr id="25" name="Slide Number Placeholder 0"/>
+          <p:cNvSpPr>
+            <a:spLocks noGrp="1"/>
+          </p:cNvSpPr>
+          <p:nvPr>
+            <p:ph type="sldNum" sz="quarter" idx="4294967295"/>
+          </p:nvPr>
+        </p:nvSpPr>
+        <p:spPr>
+          <a:xfrm>
+            <a:off x="27432" y="91440"/>
+            <a:ext cx="585216" cy="475488"/>
+          </a:xfrm>
+          <a:prstGeom prst="rect">
+            <a:avLst/>
+          </a:prstGeom>
+          <a:extLst>
+            <a:ext uri="{C572A759-6A51-4108-AA02-DFA0A04FC94B}">
+              <ma14:wrappingTextBoxFlag xmlns:ma14="http://schemas.microsoft.com/office/mac/drawingml/2011/main" val="0"/>
+            </a:ext>
+          </a:extLst>
+        </p:spPr>
+        <p:txBody>
+          <a:bodyPr/>
+          <a:lstStyle>
+            <a:lvl1pPr>
+              <a:defRPr sz="2000">
+                <a:solidFill>
+                  <a:srgbClr val="FFFFFF"/>
+                </a:solidFill>
+                <a:latin typeface="Calibri"/>
+                <a:ea typeface="Calibri"/>
+                <a:cs typeface="Calibri"/>
+              </a:defRPr>
+            </a:lvl1pPr>
+          </a:lstStyle>
+          <a:p>
+            <a:pPr algn="ctr"/>
+            <a:fld id="{F7021451-1387-4CA6-816F-3879F97B5CBC}" type="slidenum">
+              <a:rPr b="1" lang="en-US"/>
+              <a:t>48</a:t>
+            </a:fld>
+            <a:endParaRPr lang="en-US"/>
+          </a:p>
+        </p:txBody>
+      </p:sp>
+    </p:spTree>
+  </p:cSld>
+  <p:clrMapOvr>
+    <a:masterClrMapping/>
+  </p:clrMapOvr>
+</p:sld>
+</file>
+
+<file path=ppt/slides/slide49.xml><?xml version="1.0" encoding="utf-8"?>
+<p:sld xmlns:a="http://schemas.openxmlformats.org/drawingml/2006/main" xmlns:r="http://schemas.openxmlformats.org/officeDocument/2006/relationships" xmlns:p="http://schemas.openxmlformats.org/presentationml/2006/main">
+  <p:cSld name="Slide 49">
+    <p:spTree>
+      <p:nvGrpSpPr>
+        <p:cNvPr id="1" name=""/>
+        <p:cNvGrpSpPr/>
+        <p:nvPr/>
+      </p:nvGrpSpPr>
+      <p:grpSpPr>
+        <a:xfrm>
+          <a:off x="0" y="0"/>
+          <a:ext cx="0" cy="0"/>
+          <a:chOff x="0" y="0"/>
+          <a:chExt cx="0" cy="0"/>
+        </a:xfrm>
+      </p:grpSpPr>
+      <p:sp>
+        <p:nvSpPr>
+          <p:cNvPr id="2" name="Text 0"/>
+          <p:cNvSpPr/>
+          <p:nvPr/>
+        </p:nvSpPr>
+        <p:spPr>
+          <a:xfrm>
+            <a:off x="457200" y="713232"/>
+            <a:ext cx="11368735" cy="274320"/>
+          </a:xfrm>
+          <a:prstGeom prst="rect">
+            <a:avLst/>
+          </a:prstGeom>
+          <a:noFill/>
+          <a:ln/>
+        </p:spPr>
+        <p:txBody>
+          <a:bodyPr wrap="square" lIns="0" tIns="0" rIns="0" bIns="0" rtlCol="0" anchor="ctr"/>
+          <a:lstStyle/>
+          <a:p>
+            <a:pPr algn="r" indent="0" marL="0">
+              <a:buNone/>
+            </a:pPr>
+            <a:r>
+              <a:rPr lang="en-US" sz="1400" b="1" dirty="0">
+                <a:solidFill>
+                  <a:srgbClr val="1C3F6E"/>
+                </a:solidFill>
+                <a:latin typeface="Calibri" pitchFamily="34" charset="0"/>
+                <a:ea typeface="Calibri" pitchFamily="34" charset="-122"/>
+                <a:cs typeface="Calibri" pitchFamily="34" charset="-120"/>
+              </a:rPr>
               <a:t>BILINGUAL GAME</a:t>
             </a:r>
             <a:endParaRPr lang="en-US" sz="1400" dirty="0"/>
@@ -16691,7 +17517,7 @@
       </p:sp>
       <p:graphicFrame>
         <p:nvGraphicFramePr>
-          <p:cNvPr id="48" name="Table 0"/>
+          <p:cNvPr id="50" name="Table 0"/>
           <p:cNvGraphicFramePr>
             <a:graphicFrameLocks noGrp="1"/>
           </p:cNvGraphicFramePr>
@@ -17727,7 +18553,7 @@
             <a:pPr algn="ctr"/>
             <a:fld id="{F7021451-1387-4CA6-816F-3879F97B5CBC}" type="slidenum">
               <a:rPr b="1" lang="en-US"/>
-              <a:t>47</a:t>
+              <a:t>49</a:t>
             </a:fld>
             <a:endParaRPr lang="en-US"/>
           </a:p>
@@ -17741,9 +18567,9 @@
 </p:sld>
 </file>
 
-<file path=ppt/slides/slide48.xml><?xml version="1.0" encoding="utf-8"?>
+<file path=ppt/slides/slide5.xml><?xml version="1.0" encoding="utf-8"?>
 <p:sld xmlns:a="http://schemas.openxmlformats.org/drawingml/2006/main" xmlns:r="http://schemas.openxmlformats.org/officeDocument/2006/relationships" xmlns:p="http://schemas.openxmlformats.org/presentationml/2006/main">
-  <p:cSld name="Slide 48">
+  <p:cSld name="Slide 5">
     <p:spTree>
       <p:nvGrpSpPr>
         <p:cNvPr id="1" name=""/>
@@ -17791,6 +18617,225 @@
                 <a:ea typeface="Calibri" pitchFamily="34" charset="-122"/>
                 <a:cs typeface="Calibri" pitchFamily="34" charset="-120"/>
               </a:rPr>
+              <a:t>HOMEWORK CORRECTION</a:t>
+            </a:r>
+            <a:endParaRPr lang="en-US" sz="1400" dirty="0"/>
+          </a:p>
+        </p:txBody>
+      </p:sp>
+      <p:pic>
+        <p:nvPicPr>
+          <p:cNvPr id="3" name="Image 0" descr="/home/claude/f4/img/minesec_sheet.png">    </p:cNvPr>
+          <p:cNvPicPr>
+            <a:picLocks noChangeAspect="1"/>
+          </p:cNvPicPr>
+          <p:nvPr/>
+        </p:nvPicPr>
+        <p:blipFill>
+          <a:blip r:embed="rId1"/>
+          <a:stretch>
+            <a:fillRect/>
+          </a:stretch>
+        </p:blipFill>
+        <p:spPr>
+          <a:xfrm>
+            <a:off x="0" y="658368"/>
+            <a:ext cx="5120640" cy="5833872"/>
+          </a:xfrm>
+          <a:prstGeom prst="rect">
+            <a:avLst/>
+          </a:prstGeom>
+        </p:spPr>
+      </p:pic>
+      <p:sp>
+        <p:nvSpPr>
+          <p:cNvPr id="4" name="Text 1"/>
+          <p:cNvSpPr/>
+          <p:nvPr/>
+        </p:nvSpPr>
+        <p:spPr>
+          <a:xfrm>
+            <a:off x="5349240" y="1005840"/>
+            <a:ext cx="6522415" cy="731520"/>
+          </a:xfrm>
+          <a:prstGeom prst="rect">
+            <a:avLst/>
+          </a:prstGeom>
+          <a:noFill/>
+          <a:ln/>
+        </p:spPr>
+        <p:txBody>
+          <a:bodyPr wrap="square" lIns="0" tIns="0" rIns="0" bIns="0" rtlCol="0" anchor="ctr">
+            <a:normAutofit/>
+          </a:bodyPr>
+          <a:lstStyle/>
+          <a:p>
+            <a:pPr algn="ctr" indent="0" marL="0">
+              <a:buNone/>
+            </a:pPr>
+            <a:r>
+              <a:rPr lang="en-US" sz="3600" b="1" dirty="0">
+                <a:solidFill>
+                  <a:srgbClr val="990011"/>
+                </a:solidFill>
+                <a:latin typeface="Times New Roman" pitchFamily="34" charset="0"/>
+                <a:ea typeface="Times New Roman" pitchFamily="34" charset="-122"/>
+                <a:cs typeface="Times New Roman" pitchFamily="34" charset="-120"/>
+              </a:rPr>
+              <a:t>Correction: Possible Answer</a:t>
+            </a:r>
+            <a:endParaRPr lang="en-US" sz="3600" dirty="0"/>
+          </a:p>
+        </p:txBody>
+      </p:sp>
+      <p:sp>
+        <p:nvSpPr>
+          <p:cNvPr id="5" name="Text 2"/>
+          <p:cNvSpPr/>
+          <p:nvPr/>
+        </p:nvSpPr>
+        <p:spPr>
+          <a:xfrm>
+            <a:off x="5349240" y="1783080"/>
+            <a:ext cx="6522415" cy="4663440"/>
+          </a:xfrm>
+          <a:prstGeom prst="rect">
+            <a:avLst/>
+          </a:prstGeom>
+          <a:noFill/>
+          <a:ln/>
+        </p:spPr>
+        <p:txBody>
+          <a:bodyPr wrap="square" lIns="0" tIns="0" rIns="0" bIns="0" rtlCol="0" anchor="t"/>
+          <a:lstStyle/>
+          <a:p>
+            <a:pPr algn="l" indent="0" marL="0">
+              <a:spcAft>
+                <a:spcPts val="800"/>
+              </a:spcAft>
+              <a:buNone/>
+            </a:pPr>
+            <a:r>
+              <a:rPr lang="en-US" sz="4000" dirty="0">
+                <a:solidFill>
+                  <a:srgbClr val="111111"/>
+                </a:solidFill>
+                <a:latin typeface="Times New Roman" pitchFamily="34" charset="0"/>
+                <a:ea typeface="Times New Roman" pitchFamily="34" charset="-122"/>
+                <a:cs typeface="Times New Roman" pitchFamily="34" charset="-120"/>
+              </a:rPr>
+              <a:t>A framed sketch with a title, key, scale and north arrow showing roads, railway, footpaths and telephone lines and the route centre.</a:t>
+            </a:r>
+            <a:endParaRPr lang="en-US" sz="4000" dirty="0"/>
+          </a:p>
+        </p:txBody>
+      </p:sp>
+      <p:sp>
+        <p:nvSpPr>
+          <p:cNvPr id="25" name="Slide Number Placeholder 0"/>
+          <p:cNvSpPr>
+            <a:spLocks noGrp="1"/>
+          </p:cNvSpPr>
+          <p:nvPr>
+            <p:ph type="sldNum" sz="quarter" idx="4294967295"/>
+          </p:nvPr>
+        </p:nvSpPr>
+        <p:spPr>
+          <a:xfrm>
+            <a:off x="27432" y="91440"/>
+            <a:ext cx="585216" cy="475488"/>
+          </a:xfrm>
+          <a:prstGeom prst="rect">
+            <a:avLst/>
+          </a:prstGeom>
+          <a:extLst>
+            <a:ext uri="{C572A759-6A51-4108-AA02-DFA0A04FC94B}">
+              <ma14:wrappingTextBoxFlag xmlns:ma14="http://schemas.microsoft.com/office/mac/drawingml/2011/main" val="0"/>
+            </a:ext>
+          </a:extLst>
+        </p:spPr>
+        <p:txBody>
+          <a:bodyPr/>
+          <a:lstStyle>
+            <a:lvl1pPr>
+              <a:defRPr sz="2000">
+                <a:solidFill>
+                  <a:srgbClr val="FFFFFF"/>
+                </a:solidFill>
+                <a:latin typeface="Calibri"/>
+                <a:ea typeface="Calibri"/>
+                <a:cs typeface="Calibri"/>
+              </a:defRPr>
+            </a:lvl1pPr>
+          </a:lstStyle>
+          <a:p>
+            <a:pPr algn="ctr"/>
+            <a:fld id="{F7021451-1387-4CA6-816F-3879F97B5CBC}" type="slidenum">
+              <a:rPr b="1" lang="en-US"/>
+              <a:t>5</a:t>
+            </a:fld>
+            <a:endParaRPr lang="en-US"/>
+          </a:p>
+        </p:txBody>
+      </p:sp>
+    </p:spTree>
+  </p:cSld>
+  <p:clrMapOvr>
+    <a:masterClrMapping/>
+  </p:clrMapOvr>
+</p:sld>
+</file>
+
+<file path=ppt/slides/slide50.xml><?xml version="1.0" encoding="utf-8"?>
+<p:sld xmlns:a="http://schemas.openxmlformats.org/drawingml/2006/main" xmlns:r="http://schemas.openxmlformats.org/officeDocument/2006/relationships" xmlns:p="http://schemas.openxmlformats.org/presentationml/2006/main">
+  <p:cSld name="Slide 50">
+    <p:spTree>
+      <p:nvGrpSpPr>
+        <p:cNvPr id="1" name=""/>
+        <p:cNvGrpSpPr/>
+        <p:nvPr/>
+      </p:nvGrpSpPr>
+      <p:grpSpPr>
+        <a:xfrm>
+          <a:off x="0" y="0"/>
+          <a:ext cx="0" cy="0"/>
+          <a:chOff x="0" y="0"/>
+          <a:chExt cx="0" cy="0"/>
+        </a:xfrm>
+      </p:grpSpPr>
+      <p:sp>
+        <p:nvSpPr>
+          <p:cNvPr id="2" name="Text 0"/>
+          <p:cNvSpPr/>
+          <p:nvPr/>
+        </p:nvSpPr>
+        <p:spPr>
+          <a:xfrm>
+            <a:off x="457200" y="713232"/>
+            <a:ext cx="11368735" cy="274320"/>
+          </a:xfrm>
+          <a:prstGeom prst="rect">
+            <a:avLst/>
+          </a:prstGeom>
+          <a:noFill/>
+          <a:ln/>
+        </p:spPr>
+        <p:txBody>
+          <a:bodyPr wrap="square" lIns="0" tIns="0" rIns="0" bIns="0" rtlCol="0" anchor="ctr"/>
+          <a:lstStyle/>
+          <a:p>
+            <a:pPr algn="r" indent="0" marL="0">
+              <a:buNone/>
+            </a:pPr>
+            <a:r>
+              <a:rPr lang="en-US" sz="1400" b="1" dirty="0">
+                <a:solidFill>
+                  <a:srgbClr val="1C3F6E"/>
+                </a:solidFill>
+                <a:latin typeface="Calibri" pitchFamily="34" charset="0"/>
+                <a:ea typeface="Calibri" pitchFamily="34" charset="-122"/>
+                <a:cs typeface="Calibri" pitchFamily="34" charset="-120"/>
+              </a:rPr>
               <a:t>LOGBOOK</a:t>
             </a:r>
             <a:endParaRPr lang="en-US" sz="1400" dirty="0"/>
@@ -17838,7 +18883,7 @@
       </p:sp>
       <p:graphicFrame>
         <p:nvGraphicFramePr>
-          <p:cNvPr id="49" name="Table 0"/>
+          <p:cNvPr id="51" name="Table 0"/>
           <p:cNvGraphicFramePr>
             <a:graphicFrameLocks noGrp="1"/>
           </p:cNvGraphicFramePr>
@@ -18460,7 +19505,7 @@
             <a:pPr algn="ctr"/>
             <a:fld id="{F7021451-1387-4CA6-816F-3879F97B5CBC}" type="slidenum">
               <a:rPr b="1" lang="en-US"/>
-              <a:t>48</a:t>
+              <a:t>50</a:t>
             </a:fld>
             <a:endParaRPr lang="en-US"/>
           </a:p>
@@ -18474,9 +19519,9 @@
 </p:sld>
 </file>
 
-<file path=ppt/slides/slide49.xml><?xml version="1.0" encoding="utf-8"?>
+<file path=ppt/slides/slide51.xml><?xml version="1.0" encoding="utf-8"?>
 <p:sld xmlns:a="http://schemas.openxmlformats.org/drawingml/2006/main" xmlns:r="http://schemas.openxmlformats.org/officeDocument/2006/relationships" xmlns:p="http://schemas.openxmlformats.org/presentationml/2006/main">
-  <p:cSld name="Slide 49">
+  <p:cSld name="Slide 51">
     <p:spTree>
       <p:nvGrpSpPr>
         <p:cNvPr id="1" name=""/>
@@ -18571,7 +19616,7 @@
       </p:sp>
       <p:graphicFrame>
         <p:nvGraphicFramePr>
-          <p:cNvPr id="50" name="Table 0"/>
+          <p:cNvPr id="52" name="Table 0"/>
           <p:cNvGraphicFramePr>
             <a:graphicFrameLocks noGrp="1"/>
           </p:cNvGraphicFramePr>
@@ -18681,7 +19726,7 @@
                           <a:ea typeface="Calibri" pitchFamily="34" charset="-122"/>
                           <a:cs typeface="Calibri" pitchFamily="34" charset="-120"/>
                         </a:rPr>
-                        <a:t>DEFINITIONS; Types of Trade; Major Trade Routes and Global Patterns.</a:t>
+                        <a:t>DEFINITIONS; Types of Trade; Routes and Pattern; Reasons for the Dominance of AICs.</a:t>
                       </a:r>
                       <a:endParaRPr lang="en-US" sz="1600" dirty="0">
                         <a:latin typeface="Calibri" charset="0"/>
@@ -19331,7 +20376,7 @@
             <a:pPr algn="ctr"/>
             <a:fld id="{F7021451-1387-4CA6-816F-3879F97B5CBC}" type="slidenum">
               <a:rPr b="1" lang="en-US"/>
-              <a:t>49</a:t>
+              <a:t>51</a:t>
             </a:fld>
             <a:endParaRPr lang="en-US"/>
           </a:p>
@@ -19345,9 +20390,9 @@
 </p:sld>
 </file>
 
-<file path=ppt/slides/slide5.xml><?xml version="1.0" encoding="utf-8"?>
+<file path=ppt/slides/slide52.xml><?xml version="1.0" encoding="utf-8"?>
 <p:sld xmlns:a="http://schemas.openxmlformats.org/drawingml/2006/main" xmlns:r="http://schemas.openxmlformats.org/officeDocument/2006/relationships" xmlns:p="http://schemas.openxmlformats.org/presentationml/2006/main">
-  <p:cSld name="Slide 5">
+  <p:cSld name="Slide 52">
     <p:spTree>
       <p:nvGrpSpPr>
         <p:cNvPr id="1" name=""/>
@@ -19395,7 +20440,7 @@
                 <a:ea typeface="Calibri" pitchFamily="34" charset="-122"/>
                 <a:cs typeface="Calibri" pitchFamily="34" charset="-120"/>
               </a:rPr>
-              <a:t>HOMEWORK CORRECTION</a:t>
+              <a:t>TEACHER'S NOTE</a:t>
             </a:r>
             <a:endParaRPr lang="en-US" sz="1400" dirty="0"/>
           </a:p>
@@ -19460,7 +20505,7 @@
                 <a:ea typeface="Times New Roman" pitchFamily="34" charset="-122"/>
                 <a:cs typeface="Times New Roman" pitchFamily="34" charset="-120"/>
               </a:rPr>
-              <a:t>Correction: Possible Answer</a:t>
+              <a:t>Teacher's Note</a:t>
             </a:r>
             <a:endParaRPr lang="en-US" sz="3600" dirty="0"/>
           </a:p>
@@ -19487,24 +20532,130 @@
           <a:bodyPr wrap="square" lIns="0" tIns="0" rIns="0" bIns="0" rtlCol="0" anchor="t"/>
           <a:lstStyle/>
           <a:p>
-            <a:pPr algn="l" indent="0" marL="0">
+            <a:pPr algn="l" marL="342900" indent="-342900">
               <a:spcAft>
                 <a:spcPts val="800"/>
               </a:spcAft>
-              <a:buNone/>
+              <a:buSzPct val="100000"/>
+              <a:buChar char="•"/>
             </a:pPr>
             <a:r>
-              <a:rPr lang="en-US" sz="4000" dirty="0">
+              <a:rPr lang="en-US" sz="2000" dirty="0">
                 <a:solidFill>
                   <a:srgbClr val="111111"/>
                 </a:solidFill>
-                <a:latin typeface="Times New Roman" pitchFamily="34" charset="0"/>
-                <a:ea typeface="Times New Roman" pitchFamily="34" charset="-122"/>
-                <a:cs typeface="Times New Roman" pitchFamily="34" charset="-120"/>
+                <a:latin typeface="Calibri" pitchFamily="34" charset="0"/>
+                <a:ea typeface="Calibri" pitchFamily="34" charset="-122"/>
+                <a:cs typeface="Calibri" pitchFamily="34" charset="-120"/>
               </a:rPr>
-              <a:t>A framed sketch with a title, key, scale and north arrow showing roads, railway, footpaths and telephone lines and the route centre.</a:t>
-            </a:r>
-            <a:endParaRPr lang="en-US" sz="4000" dirty="0"/>
+              <a:t>Timing: Homework correction, plan, objectives 8 min | Recall, situation, action 10 min | 5 activities 30 min | Board summary (copying) 30 min | Evaluation, remediation 10 min | Homework, next lesson 5 min | Logbook 7 min</a:t>
+            </a:r>
+            <a:endParaRPr lang="en-US" sz="2000" dirty="0"/>
+          </a:p>
+          <a:p>
+            <a:pPr algn="l" marL="342900" indent="-342900">
+              <a:spcAft>
+                <a:spcPts val="800"/>
+              </a:spcAft>
+              <a:buSzPct val="100000"/>
+              <a:buChar char="•"/>
+            </a:pPr>
+            <a:r>
+              <a:rPr lang="en-US" sz="2000" dirty="0">
+                <a:solidFill>
+                  <a:srgbClr val="111111"/>
+                </a:solidFill>
+                <a:latin typeface="Calibri" pitchFamily="34" charset="0"/>
+                <a:ea typeface="Calibri" pitchFamily="34" charset="-122"/>
+                <a:cs typeface="Calibri" pitchFamily="34" charset="-120"/>
+              </a:rPr>
+              <a:t>Without the projector (Activity 1): give examples.</a:t>
+            </a:r>
+            <a:endParaRPr lang="en-US" sz="2000" dirty="0"/>
+          </a:p>
+          <a:p>
+            <a:pPr algn="l" marL="342900" indent="-342900">
+              <a:spcAft>
+                <a:spcPts val="800"/>
+              </a:spcAft>
+              <a:buSzPct val="100000"/>
+              <a:buChar char="•"/>
+            </a:pPr>
+            <a:r>
+              <a:rPr lang="en-US" sz="2000" dirty="0">
+                <a:solidFill>
+                  <a:srgbClr val="111111"/>
+                </a:solidFill>
+                <a:latin typeface="Calibri" pitchFamily="34" charset="0"/>
+                <a:ea typeface="Calibri" pitchFamily="34" charset="-122"/>
+                <a:cs typeface="Calibri" pitchFamily="34" charset="-120"/>
+              </a:rPr>
+              <a:t>Without the projector (Activity 2): give examples.</a:t>
+            </a:r>
+            <a:endParaRPr lang="en-US" sz="2000" dirty="0"/>
+          </a:p>
+          <a:p>
+            <a:pPr algn="l" marL="342900" indent="-342900">
+              <a:spcAft>
+                <a:spcPts val="800"/>
+              </a:spcAft>
+              <a:buSzPct val="100000"/>
+              <a:buChar char="•"/>
+            </a:pPr>
+            <a:r>
+              <a:rPr lang="en-US" sz="2000" dirty="0">
+                <a:solidFill>
+                  <a:srgbClr val="111111"/>
+                </a:solidFill>
+                <a:latin typeface="Calibri" pitchFamily="34" charset="0"/>
+                <a:ea typeface="Calibri" pitchFamily="34" charset="-122"/>
+                <a:cs typeface="Calibri" pitchFamily="34" charset="-120"/>
+              </a:rPr>
+              <a:t>Without the projector (Activity 3): use the atlas.</a:t>
+            </a:r>
+            <a:endParaRPr lang="en-US" sz="2000" dirty="0"/>
+          </a:p>
+          <a:p>
+            <a:pPr algn="l" marL="342900" indent="-342900">
+              <a:spcAft>
+                <a:spcPts val="800"/>
+              </a:spcAft>
+              <a:buSzPct val="100000"/>
+              <a:buChar char="•"/>
+            </a:pPr>
+            <a:r>
+              <a:rPr lang="en-US" sz="2000" dirty="0">
+                <a:solidFill>
+                  <a:srgbClr val="111111"/>
+                </a:solidFill>
+                <a:latin typeface="Calibri" pitchFamily="34" charset="0"/>
+                <a:ea typeface="Calibri" pitchFamily="34" charset="-122"/>
+                <a:cs typeface="Calibri" pitchFamily="34" charset="-120"/>
+              </a:rPr>
+              <a:t>Without the projector (Activity 4): discuss.</a:t>
+            </a:r>
+            <a:endParaRPr lang="en-US" sz="2000" dirty="0"/>
+          </a:p>
+          <a:p>
+            <a:pPr algn="l" marL="342900" indent="-342900">
+              <a:spcAft>
+                <a:spcPts val="800"/>
+              </a:spcAft>
+              <a:buSzPct val="100000"/>
+              <a:buChar char="•"/>
+            </a:pPr>
+            <a:r>
+              <a:rPr lang="en-US" sz="2000" dirty="0">
+                <a:solidFill>
+                  <a:srgbClr val="111111"/>
+                </a:solidFill>
+                <a:latin typeface="Calibri" pitchFamily="34" charset="0"/>
+                <a:ea typeface="Calibri" pitchFamily="34" charset="-122"/>
+                <a:cs typeface="Calibri" pitchFamily="34" charset="-120"/>
+              </a:rPr>
+              <a:t>Without the projector (Activity 5): discuss.</a:t>
+            </a:r>
+            <a:endParaRPr lang="en-US" sz="2000" dirty="0"/>
           </a:p>
         </p:txBody>
       </p:sp>
@@ -19550,7 +20701,7 @@
             <a:pPr algn="ctr"/>
             <a:fld id="{F7021451-1387-4CA6-816F-3879F97B5CBC}" type="slidenum">
               <a:rPr b="1" lang="en-US"/>
-              <a:t>5</a:t>
+              <a:t>52</a:t>
             </a:fld>
             <a:endParaRPr lang="en-US"/>
           </a:p>
@@ -19564,9 +20715,9 @@
 </p:sld>
 </file>
 
-<file path=ppt/slides/slide50.xml><?xml version="1.0" encoding="utf-8"?>
+<file path=ppt/slides/slide53.xml><?xml version="1.0" encoding="utf-8"?>
 <p:sld xmlns:a="http://schemas.openxmlformats.org/drawingml/2006/main" xmlns:r="http://schemas.openxmlformats.org/officeDocument/2006/relationships" xmlns:p="http://schemas.openxmlformats.org/presentationml/2006/main">
-  <p:cSld name="Slide 50">
+  <p:cSld name="Slide 53">
     <p:spTree>
       <p:nvGrpSpPr>
         <p:cNvPr id="1" name=""/>
@@ -19614,7 +20765,7 @@
                 <a:ea typeface="Calibri" pitchFamily="34" charset="-122"/>
                 <a:cs typeface="Calibri" pitchFamily="34" charset="-120"/>
               </a:rPr>
-              <a:t>TEACHER'S NOTE</a:t>
+              <a:t>REFERENCES</a:t>
             </a:r>
             <a:endParaRPr lang="en-US" sz="1400" dirty="0"/>
           </a:p>
@@ -19679,7 +20830,7 @@
                 <a:ea typeface="Times New Roman" pitchFamily="34" charset="-122"/>
                 <a:cs typeface="Times New Roman" pitchFamily="34" charset="-120"/>
               </a:rPr>
-              <a:t>Teacher's Note</a:t>
+              <a:t>References</a:t>
             </a:r>
             <a:endParaRPr lang="en-US" sz="3600" dirty="0"/>
           </a:p>
@@ -19714,7 +20865,7 @@
               <a:buChar char="•"/>
             </a:pPr>
             <a:r>
-              <a:rPr lang="en-US" sz="2000" dirty="0">
+              <a:rPr lang="en-US" sz="1800" dirty="0">
                 <a:solidFill>
                   <a:srgbClr val="111111"/>
                 </a:solidFill>
@@ -19722,9 +20873,9 @@
                 <a:ea typeface="Calibri" pitchFamily="34" charset="-122"/>
                 <a:cs typeface="Calibri" pitchFamily="34" charset="-120"/>
               </a:rPr>
-              <a:t>Timing: Homework correction, plan, objectives 8 min | Recall, situation, action 10 min | 5 activities 30 min | Board summary (copying) 30 min | Evaluation, remediation 10 min | Homework, next lesson 5 min | Logbook 7 min</a:t>
-            </a:r>
-            <a:endParaRPr lang="en-US" sz="2000" dirty="0"/>
+              <a:t>Geography Syllabus, Forms I–V, MINESEC (2023) — Form 5, Module I: Management of Manufacturing and Tertiary Activities.</a:t>
+            </a:r>
+            <a:endParaRPr lang="en-US" sz="1800" dirty="0"/>
           </a:p>
           <a:p>
             <a:pPr algn="l" marL="342900" indent="-342900">
@@ -19735,7 +20886,7 @@
               <a:buChar char="•"/>
             </a:pPr>
             <a:r>
-              <a:rPr lang="en-US" sz="2000" dirty="0">
+              <a:rPr lang="en-US" sz="1800" dirty="0">
                 <a:solidFill>
                   <a:srgbClr val="111111"/>
                 </a:solidFill>
@@ -19743,9 +20894,9 @@
                 <a:ea typeface="Calibri" pitchFamily="34" charset="-122"/>
                 <a:cs typeface="Calibri" pitchFamily="34" charset="-120"/>
               </a:rPr>
-              <a:t>Without the projector (Activity 1): give examples.</a:t>
-            </a:r>
-            <a:endParaRPr lang="en-US" sz="2000" dirty="0"/>
+              <a:t>Photo, Activity 1: “Sandga Market in Douala, Cameroon” by The Advocacy Project, CC BY-NC-SA 2.0, via Flickr (https://www.flickr.com/photos/42487558@N00/3636438732)</a:t>
+            </a:r>
+            <a:endParaRPr lang="en-US" sz="1800" dirty="0"/>
           </a:p>
           <a:p>
             <a:pPr algn="l" marL="342900" indent="-342900">
@@ -19756,7 +20907,7 @@
               <a:buChar char="•"/>
             </a:pPr>
             <a:r>
-              <a:rPr lang="en-US" sz="2000" dirty="0">
+              <a:rPr lang="en-US" sz="1800" dirty="0">
                 <a:solidFill>
                   <a:srgbClr val="111111"/>
                 </a:solidFill>
@@ -19764,9 +20915,9 @@
                 <a:ea typeface="Calibri" pitchFamily="34" charset="-122"/>
                 <a:cs typeface="Calibri" pitchFamily="34" charset="-120"/>
               </a:rPr>
-              <a:t>Without the projector (Activity 2): give examples.</a:t>
-            </a:r>
-            <a:endParaRPr lang="en-US" sz="2000" dirty="0"/>
+              <a:t>Photo, Activity 2: “Container Ships @ Port of Oakland” by jdnx, CC BY 2.0, via Flickr (https://www.flickr.com/photos/21442511@N08/3464243881)</a:t>
+            </a:r>
+            <a:endParaRPr lang="en-US" sz="1800" dirty="0"/>
           </a:p>
           <a:p>
             <a:pPr algn="l" marL="342900" indent="-342900">
@@ -19777,7 +20928,7 @@
               <a:buChar char="•"/>
             </a:pPr>
             <a:r>
-              <a:rPr lang="en-US" sz="2000" dirty="0">
+              <a:rPr lang="en-US" sz="1800" dirty="0">
                 <a:solidFill>
                   <a:srgbClr val="111111"/>
                 </a:solidFill>
@@ -19785,9 +20936,9 @@
                 <a:ea typeface="Calibri" pitchFamily="34" charset="-122"/>
                 <a:cs typeface="Calibri" pitchFamily="34" charset="-120"/>
               </a:rPr>
-              <a:t>Without the projector (Activity 3): use the atlas.</a:t>
-            </a:r>
-            <a:endParaRPr lang="en-US" sz="2000" dirty="0"/>
+              <a:t>Photo, Activity 3: “MV Maersk Taikung” by tim.md, CC BY-NC-ND 2.0, via Flickr (https://www.flickr.com/photos/50299151@N00/3252980648)</a:t>
+            </a:r>
+            <a:endParaRPr lang="en-US" sz="1800" dirty="0"/>
           </a:p>
           <a:p>
             <a:pPr algn="l" marL="342900" indent="-342900">
@@ -19798,7 +20949,7 @@
               <a:buChar char="•"/>
             </a:pPr>
             <a:r>
-              <a:rPr lang="en-US" sz="2000" dirty="0">
+              <a:rPr lang="en-US" sz="1800" dirty="0">
                 <a:solidFill>
                   <a:srgbClr val="111111"/>
                 </a:solidFill>
@@ -19806,30 +20957,9 @@
                 <a:ea typeface="Calibri" pitchFamily="34" charset="-122"/>
                 <a:cs typeface="Calibri" pitchFamily="34" charset="-120"/>
               </a:rPr>
-              <a:t>Without the projector (Activity 4): discuss.</a:t>
-            </a:r>
-            <a:endParaRPr lang="en-US" sz="2000" dirty="0"/>
-          </a:p>
-          <a:p>
-            <a:pPr algn="l" marL="342900" indent="-342900">
-              <a:spcAft>
-                <a:spcPts val="800"/>
-              </a:spcAft>
-              <a:buSzPct val="100000"/>
-              <a:buChar char="•"/>
-            </a:pPr>
-            <a:r>
-              <a:rPr lang="en-US" sz="2000" dirty="0">
-                <a:solidFill>
-                  <a:srgbClr val="111111"/>
-                </a:solidFill>
-                <a:latin typeface="Calibri" pitchFamily="34" charset="0"/>
-                <a:ea typeface="Calibri" pitchFamily="34" charset="-122"/>
-                <a:cs typeface="Calibri" pitchFamily="34" charset="-120"/>
-              </a:rPr>
-              <a:t>Without the projector (Activity 5): discuss.</a:t>
-            </a:r>
-            <a:endParaRPr lang="en-US" sz="2000" dirty="0"/>
+              <a:t>Diagrams and animations: drawn for this lesson (Geography Department).</a:t>
+            </a:r>
+            <a:endParaRPr lang="en-US" sz="1800" dirty="0"/>
           </a:p>
         </p:txBody>
       </p:sp>
@@ -19875,311 +21005,7 @@
             <a:pPr algn="ctr"/>
             <a:fld id="{F7021451-1387-4CA6-816F-3879F97B5CBC}" type="slidenum">
               <a:rPr b="1" lang="en-US"/>
-              <a:t>50</a:t>
-            </a:fld>
-            <a:endParaRPr lang="en-US"/>
-          </a:p>
-        </p:txBody>
-      </p:sp>
-    </p:spTree>
-  </p:cSld>
-  <p:clrMapOvr>
-    <a:masterClrMapping/>
-  </p:clrMapOvr>
-</p:sld>
-</file>
-
-<file path=ppt/slides/slide51.xml><?xml version="1.0" encoding="utf-8"?>
-<p:sld xmlns:a="http://schemas.openxmlformats.org/drawingml/2006/main" xmlns:r="http://schemas.openxmlformats.org/officeDocument/2006/relationships" xmlns:p="http://schemas.openxmlformats.org/presentationml/2006/main">
-  <p:cSld name="Slide 51">
-    <p:spTree>
-      <p:nvGrpSpPr>
-        <p:cNvPr id="1" name=""/>
-        <p:cNvGrpSpPr/>
-        <p:nvPr/>
-      </p:nvGrpSpPr>
-      <p:grpSpPr>
-        <a:xfrm>
-          <a:off x="0" y="0"/>
-          <a:ext cx="0" cy="0"/>
-          <a:chOff x="0" y="0"/>
-          <a:chExt cx="0" cy="0"/>
-        </a:xfrm>
-      </p:grpSpPr>
-      <p:sp>
-        <p:nvSpPr>
-          <p:cNvPr id="2" name="Text 0"/>
-          <p:cNvSpPr/>
-          <p:nvPr/>
-        </p:nvSpPr>
-        <p:spPr>
-          <a:xfrm>
-            <a:off x="457200" y="713232"/>
-            <a:ext cx="11368735" cy="274320"/>
-          </a:xfrm>
-          <a:prstGeom prst="rect">
-            <a:avLst/>
-          </a:prstGeom>
-          <a:noFill/>
-          <a:ln/>
-        </p:spPr>
-        <p:txBody>
-          <a:bodyPr wrap="square" lIns="0" tIns="0" rIns="0" bIns="0" rtlCol="0" anchor="ctr"/>
-          <a:lstStyle/>
-          <a:p>
-            <a:pPr algn="r" indent="0" marL="0">
-              <a:buNone/>
-            </a:pPr>
-            <a:r>
-              <a:rPr lang="en-US" sz="1400" b="1" dirty="0">
-                <a:solidFill>
-                  <a:srgbClr val="1C3F6E"/>
-                </a:solidFill>
-                <a:latin typeface="Calibri" pitchFamily="34" charset="0"/>
-                <a:ea typeface="Calibri" pitchFamily="34" charset="-122"/>
-                <a:cs typeface="Calibri" pitchFamily="34" charset="-120"/>
-              </a:rPr>
-              <a:t>REFERENCES</a:t>
-            </a:r>
-            <a:endParaRPr lang="en-US" sz="1400" dirty="0"/>
-          </a:p>
-        </p:txBody>
-      </p:sp>
-      <p:pic>
-        <p:nvPicPr>
-          <p:cNvPr id="3" name="Image 0" descr="/home/claude/f4/img/minesec_sheet.png">    </p:cNvPr>
-          <p:cNvPicPr>
-            <a:picLocks noChangeAspect="1"/>
-          </p:cNvPicPr>
-          <p:nvPr/>
-        </p:nvPicPr>
-        <p:blipFill>
-          <a:blip r:embed="rId1"/>
-          <a:stretch>
-            <a:fillRect/>
-          </a:stretch>
-        </p:blipFill>
-        <p:spPr>
-          <a:xfrm>
-            <a:off x="0" y="658368"/>
-            <a:ext cx="5120640" cy="5833872"/>
-          </a:xfrm>
-          <a:prstGeom prst="rect">
-            <a:avLst/>
-          </a:prstGeom>
-        </p:spPr>
-      </p:pic>
-      <p:sp>
-        <p:nvSpPr>
-          <p:cNvPr id="4" name="Text 1"/>
-          <p:cNvSpPr/>
-          <p:nvPr/>
-        </p:nvSpPr>
-        <p:spPr>
-          <a:xfrm>
-            <a:off x="5349240" y="1005840"/>
-            <a:ext cx="6522415" cy="731520"/>
-          </a:xfrm>
-          <a:prstGeom prst="rect">
-            <a:avLst/>
-          </a:prstGeom>
-          <a:noFill/>
-          <a:ln/>
-        </p:spPr>
-        <p:txBody>
-          <a:bodyPr wrap="square" lIns="0" tIns="0" rIns="0" bIns="0" rtlCol="0" anchor="ctr">
-            <a:normAutofit/>
-          </a:bodyPr>
-          <a:lstStyle/>
-          <a:p>
-            <a:pPr algn="ctr" indent="0" marL="0">
-              <a:buNone/>
-            </a:pPr>
-            <a:r>
-              <a:rPr lang="en-US" sz="3600" b="1" dirty="0">
-                <a:solidFill>
-                  <a:srgbClr val="990011"/>
-                </a:solidFill>
-                <a:latin typeface="Times New Roman" pitchFamily="34" charset="0"/>
-                <a:ea typeface="Times New Roman" pitchFamily="34" charset="-122"/>
-                <a:cs typeface="Times New Roman" pitchFamily="34" charset="-120"/>
-              </a:rPr>
-              <a:t>References</a:t>
-            </a:r>
-            <a:endParaRPr lang="en-US" sz="3600" dirty="0"/>
-          </a:p>
-        </p:txBody>
-      </p:sp>
-      <p:sp>
-        <p:nvSpPr>
-          <p:cNvPr id="5" name="Text 2"/>
-          <p:cNvSpPr/>
-          <p:nvPr/>
-        </p:nvSpPr>
-        <p:spPr>
-          <a:xfrm>
-            <a:off x="5349240" y="1783080"/>
-            <a:ext cx="6522415" cy="4663440"/>
-          </a:xfrm>
-          <a:prstGeom prst="rect">
-            <a:avLst/>
-          </a:prstGeom>
-          <a:noFill/>
-          <a:ln/>
-        </p:spPr>
-        <p:txBody>
-          <a:bodyPr wrap="square" lIns="0" tIns="0" rIns="0" bIns="0" rtlCol="0" anchor="t"/>
-          <a:lstStyle/>
-          <a:p>
-            <a:pPr algn="l" marL="342900" indent="-342900">
-              <a:spcAft>
-                <a:spcPts val="800"/>
-              </a:spcAft>
-              <a:buSzPct val="100000"/>
-              <a:buChar char="•"/>
-            </a:pPr>
-            <a:r>
-              <a:rPr lang="en-US" sz="1800" dirty="0">
-                <a:solidFill>
-                  <a:srgbClr val="111111"/>
-                </a:solidFill>
-                <a:latin typeface="Calibri" pitchFamily="34" charset="0"/>
-                <a:ea typeface="Calibri" pitchFamily="34" charset="-122"/>
-                <a:cs typeface="Calibri" pitchFamily="34" charset="-120"/>
-              </a:rPr>
-              <a:t>Geography Syllabus, Forms I–V, MINESEC (2023) — Form 5, Module I: Management of Manufacturing and Tertiary Activities.</a:t>
-            </a:r>
-            <a:endParaRPr lang="en-US" sz="1800" dirty="0"/>
-          </a:p>
-          <a:p>
-            <a:pPr algn="l" marL="342900" indent="-342900">
-              <a:spcAft>
-                <a:spcPts val="800"/>
-              </a:spcAft>
-              <a:buSzPct val="100000"/>
-              <a:buChar char="•"/>
-            </a:pPr>
-            <a:r>
-              <a:rPr lang="en-US" sz="1800" dirty="0">
-                <a:solidFill>
-                  <a:srgbClr val="111111"/>
-                </a:solidFill>
-                <a:latin typeface="Calibri" pitchFamily="34" charset="0"/>
-                <a:ea typeface="Calibri" pitchFamily="34" charset="-122"/>
-                <a:cs typeface="Calibri" pitchFamily="34" charset="-120"/>
-              </a:rPr>
-              <a:t>Photo, Activity 1: “Sandga Market in Douala, Cameroon” by The Advocacy Project, CC BY-NC-SA 2.0, via Flickr (https://www.flickr.com/photos/42487558@N00/3636438732)</a:t>
-            </a:r>
-            <a:endParaRPr lang="en-US" sz="1800" dirty="0"/>
-          </a:p>
-          <a:p>
-            <a:pPr algn="l" marL="342900" indent="-342900">
-              <a:spcAft>
-                <a:spcPts val="800"/>
-              </a:spcAft>
-              <a:buSzPct val="100000"/>
-              <a:buChar char="•"/>
-            </a:pPr>
-            <a:r>
-              <a:rPr lang="en-US" sz="1800" dirty="0">
-                <a:solidFill>
-                  <a:srgbClr val="111111"/>
-                </a:solidFill>
-                <a:latin typeface="Calibri" pitchFamily="34" charset="0"/>
-                <a:ea typeface="Calibri" pitchFamily="34" charset="-122"/>
-                <a:cs typeface="Calibri" pitchFamily="34" charset="-120"/>
-              </a:rPr>
-              <a:t>Photo, Activity 2: “Container Ships @ Port of Oakland” by jdnx, CC BY 2.0, via Flickr (https://www.flickr.com/photos/21442511@N08/3464243881)</a:t>
-            </a:r>
-            <a:endParaRPr lang="en-US" sz="1800" dirty="0"/>
-          </a:p>
-          <a:p>
-            <a:pPr algn="l" marL="342900" indent="-342900">
-              <a:spcAft>
-                <a:spcPts val="800"/>
-              </a:spcAft>
-              <a:buSzPct val="100000"/>
-              <a:buChar char="•"/>
-            </a:pPr>
-            <a:r>
-              <a:rPr lang="en-US" sz="1800" dirty="0">
-                <a:solidFill>
-                  <a:srgbClr val="111111"/>
-                </a:solidFill>
-                <a:latin typeface="Calibri" pitchFamily="34" charset="0"/>
-                <a:ea typeface="Calibri" pitchFamily="34" charset="-122"/>
-                <a:cs typeface="Calibri" pitchFamily="34" charset="-120"/>
-              </a:rPr>
-              <a:t>Photo, Activity 3: “MV Maersk Taikung” by tim.md, CC BY-NC-ND 2.0, via Flickr (https://www.flickr.com/photos/50299151@N00/3252980648)</a:t>
-            </a:r>
-            <a:endParaRPr lang="en-US" sz="1800" dirty="0"/>
-          </a:p>
-          <a:p>
-            <a:pPr algn="l" marL="342900" indent="-342900">
-              <a:spcAft>
-                <a:spcPts val="800"/>
-              </a:spcAft>
-              <a:buSzPct val="100000"/>
-              <a:buChar char="•"/>
-            </a:pPr>
-            <a:r>
-              <a:rPr lang="en-US" sz="1800" dirty="0">
-                <a:solidFill>
-                  <a:srgbClr val="111111"/>
-                </a:solidFill>
-                <a:latin typeface="Calibri" pitchFamily="34" charset="0"/>
-                <a:ea typeface="Calibri" pitchFamily="34" charset="-122"/>
-                <a:cs typeface="Calibri" pitchFamily="34" charset="-120"/>
-              </a:rPr>
-              <a:t>Diagrams and animations: drawn for this lesson (Geography Department).</a:t>
-            </a:r>
-            <a:endParaRPr lang="en-US" sz="1800" dirty="0"/>
-          </a:p>
-        </p:txBody>
-      </p:sp>
-      <p:sp>
-        <p:nvSpPr>
-          <p:cNvPr id="25" name="Slide Number Placeholder 0"/>
-          <p:cNvSpPr>
-            <a:spLocks noGrp="1"/>
-          </p:cNvSpPr>
-          <p:nvPr>
-            <p:ph type="sldNum" sz="quarter" idx="4294967295"/>
-          </p:nvPr>
-        </p:nvSpPr>
-        <p:spPr>
-          <a:xfrm>
-            <a:off x="27432" y="91440"/>
-            <a:ext cx="585216" cy="475488"/>
-          </a:xfrm>
-          <a:prstGeom prst="rect">
-            <a:avLst/>
-          </a:prstGeom>
-          <a:extLst>
-            <a:ext uri="{C572A759-6A51-4108-AA02-DFA0A04FC94B}">
-              <ma14:wrappingTextBoxFlag xmlns:ma14="http://schemas.microsoft.com/office/mac/drawingml/2011/main" val="0"/>
-            </a:ext>
-          </a:extLst>
-        </p:spPr>
-        <p:txBody>
-          <a:bodyPr/>
-          <a:lstStyle>
-            <a:lvl1pPr>
-              <a:defRPr sz="2000">
-                <a:solidFill>
-                  <a:srgbClr val="FFFFFF"/>
-                </a:solidFill>
-                <a:latin typeface="Calibri"/>
-                <a:ea typeface="Calibri"/>
-                <a:cs typeface="Calibri"/>
-              </a:defRPr>
-            </a:lvl1pPr>
-          </a:lstStyle>
-          <a:p>
-            <a:pPr algn="ctr"/>
-            <a:fld id="{F7021451-1387-4CA6-816F-3879F97B5CBC}" type="slidenum">
-              <a:rPr b="1" lang="en-US"/>
-              <a:t>51</a:t>
+              <a:t>53</a:t>
             </a:fld>
             <a:endParaRPr lang="en-US"/>
           </a:p>
